--- a/docs/pptx/auc3/ritu-auc3-linsubhr-dosedisc-sideeffect.pptx
+++ b/docs/pptx/auc3/ritu-auc3-linsubhr-dosedisc-sideeffect.pptx
@@ -2443,7 +2443,7 @@
           </p:nvSpPr>
           <p:spPr>
             <a:xfrm>
-              <a:off x="980186" y="1896563"/>
+              <a:off x="980739" y="1896563"/>
               <a:ext cx="0" cy="3826579"/>
             </a:xfrm>
             <a:custGeom>
@@ -2486,7 +2486,7 @@
           </p:nvSpPr>
           <p:spPr>
             <a:xfrm>
-              <a:off x="3262630" y="1896563"/>
+              <a:off x="3260798" y="1896563"/>
               <a:ext cx="0" cy="3826579"/>
             </a:xfrm>
             <a:custGeom>
@@ -2529,7 +2529,7 @@
           </p:nvSpPr>
           <p:spPr>
             <a:xfrm>
-              <a:off x="5545073" y="1896563"/>
+              <a:off x="5540858" y="1896563"/>
               <a:ext cx="0" cy="3826579"/>
             </a:xfrm>
             <a:custGeom>
@@ -2572,7 +2572,7 @@
           </p:nvSpPr>
           <p:spPr>
             <a:xfrm>
-              <a:off x="7827517" y="1896563"/>
+              <a:off x="7820918" y="1896563"/>
               <a:ext cx="0" cy="3826579"/>
             </a:xfrm>
             <a:custGeom>
@@ -2830,7 +2830,7 @@
           </p:nvSpPr>
           <p:spPr>
             <a:xfrm>
-              <a:off x="2121408" y="1896563"/>
+              <a:off x="2120768" y="1896563"/>
               <a:ext cx="0" cy="3826579"/>
             </a:xfrm>
             <a:custGeom>
@@ -2873,7 +2873,7 @@
           </p:nvSpPr>
           <p:spPr>
             <a:xfrm>
-              <a:off x="4403852" y="1896563"/>
+              <a:off x="4400828" y="1896563"/>
               <a:ext cx="0" cy="3826579"/>
             </a:xfrm>
             <a:custGeom>
@@ -2916,7 +2916,7 @@
           </p:nvSpPr>
           <p:spPr>
             <a:xfrm>
-              <a:off x="6686295" y="1896563"/>
+              <a:off x="6680888" y="1896563"/>
               <a:ext cx="0" cy="3826579"/>
             </a:xfrm>
             <a:custGeom>
@@ -2960,581 +2960,581 @@
           <p:spPr>
             <a:xfrm>
               <a:off x="1172049" y="1896563"/>
-              <a:ext cx="7090630" cy="3455196"/>
+              <a:ext cx="7090630" cy="3448782"/>
             </a:xfrm>
             <a:custGeom>
               <a:avLst/>
               <a:pathLst>
-                <a:path w="7090630" h="3455196">
+                <a:path w="7090630" h="3448782">
                   <a:moveTo>
-                    <a:pt x="0" y="1157672"/>
+                    <a:pt x="0" y="1083138"/>
                   </a:moveTo>
                   <a:lnTo>
-                    <a:pt x="71622" y="1215792"/>
-                  </a:lnTo>
-                  <a:lnTo>
-                    <a:pt x="143245" y="1272557"/>
-                  </a:lnTo>
-                  <a:lnTo>
-                    <a:pt x="214867" y="1328001"/>
-                  </a:lnTo>
-                  <a:lnTo>
-                    <a:pt x="286490" y="1382153"/>
-                  </a:lnTo>
-                  <a:lnTo>
-                    <a:pt x="358112" y="1435043"/>
-                  </a:lnTo>
-                  <a:lnTo>
-                    <a:pt x="429735" y="1486702"/>
-                  </a:lnTo>
-                  <a:lnTo>
-                    <a:pt x="501357" y="1537157"/>
-                  </a:lnTo>
-                  <a:lnTo>
-                    <a:pt x="572980" y="1586436"/>
-                  </a:lnTo>
-                  <a:lnTo>
-                    <a:pt x="644602" y="1634568"/>
-                  </a:lnTo>
-                  <a:lnTo>
-                    <a:pt x="716225" y="1681579"/>
-                  </a:lnTo>
-                  <a:lnTo>
-                    <a:pt x="787847" y="1727494"/>
-                  </a:lnTo>
-                  <a:lnTo>
-                    <a:pt x="859470" y="1772340"/>
-                  </a:lnTo>
-                  <a:lnTo>
-                    <a:pt x="931092" y="1816141"/>
-                  </a:lnTo>
-                  <a:lnTo>
-                    <a:pt x="1002715" y="1858922"/>
-                  </a:lnTo>
-                  <a:lnTo>
-                    <a:pt x="1074337" y="1900706"/>
-                  </a:lnTo>
-                  <a:lnTo>
-                    <a:pt x="1145960" y="1941517"/>
-                  </a:lnTo>
-                  <a:lnTo>
-                    <a:pt x="1217582" y="1981377"/>
-                  </a:lnTo>
-                  <a:lnTo>
-                    <a:pt x="1289205" y="2020309"/>
-                  </a:lnTo>
-                  <a:lnTo>
-                    <a:pt x="1360827" y="2058334"/>
-                  </a:lnTo>
-                  <a:lnTo>
-                    <a:pt x="1432450" y="2095473"/>
-                  </a:lnTo>
-                  <a:lnTo>
-                    <a:pt x="1504073" y="2131747"/>
-                  </a:lnTo>
-                  <a:lnTo>
-                    <a:pt x="1575695" y="2167176"/>
-                  </a:lnTo>
-                  <a:lnTo>
-                    <a:pt x="1647318" y="2201779"/>
-                  </a:lnTo>
-                  <a:lnTo>
-                    <a:pt x="1718940" y="2235577"/>
-                  </a:lnTo>
-                  <a:lnTo>
-                    <a:pt x="1790563" y="2268587"/>
-                  </a:lnTo>
-                  <a:lnTo>
-                    <a:pt x="1862185" y="2300828"/>
-                  </a:lnTo>
-                  <a:lnTo>
-                    <a:pt x="1933808" y="2332318"/>
-                  </a:lnTo>
-                  <a:lnTo>
-                    <a:pt x="2005430" y="2363075"/>
-                  </a:lnTo>
-                  <a:lnTo>
-                    <a:pt x="2077053" y="2393115"/>
-                  </a:lnTo>
-                  <a:lnTo>
-                    <a:pt x="2148675" y="2422456"/>
-                  </a:lnTo>
-                  <a:lnTo>
-                    <a:pt x="2220298" y="2451112"/>
-                  </a:lnTo>
-                  <a:lnTo>
-                    <a:pt x="2291920" y="2479102"/>
-                  </a:lnTo>
-                  <a:lnTo>
-                    <a:pt x="2363543" y="2506439"/>
-                  </a:lnTo>
-                  <a:lnTo>
-                    <a:pt x="2435165" y="2533140"/>
-                  </a:lnTo>
-                  <a:lnTo>
-                    <a:pt x="2506788" y="2559218"/>
-                  </a:lnTo>
-                  <a:lnTo>
-                    <a:pt x="2578410" y="2584689"/>
-                  </a:lnTo>
-                  <a:lnTo>
-                    <a:pt x="2650033" y="2609567"/>
-                  </a:lnTo>
-                  <a:lnTo>
-                    <a:pt x="2721655" y="2633865"/>
-                  </a:lnTo>
-                  <a:lnTo>
-                    <a:pt x="2793278" y="2657597"/>
-                  </a:lnTo>
-                  <a:lnTo>
-                    <a:pt x="2864901" y="2680777"/>
-                  </a:lnTo>
-                  <a:lnTo>
-                    <a:pt x="2936523" y="2703416"/>
-                  </a:lnTo>
-                  <a:lnTo>
-                    <a:pt x="3008146" y="2725528"/>
-                  </a:lnTo>
-                  <a:lnTo>
-                    <a:pt x="3079768" y="2747125"/>
-                  </a:lnTo>
-                  <a:lnTo>
-                    <a:pt x="3151391" y="2768219"/>
-                  </a:lnTo>
-                  <a:lnTo>
-                    <a:pt x="3223013" y="2774662"/>
-                  </a:lnTo>
-                  <a:lnTo>
-                    <a:pt x="3294636" y="2745061"/>
-                  </a:lnTo>
-                  <a:lnTo>
-                    <a:pt x="3366258" y="2714462"/>
-                  </a:lnTo>
-                  <a:lnTo>
-                    <a:pt x="3437881" y="2682831"/>
-                  </a:lnTo>
-                  <a:lnTo>
-                    <a:pt x="3509503" y="2650134"/>
-                  </a:lnTo>
-                  <a:lnTo>
-                    <a:pt x="3581126" y="2616335"/>
-                  </a:lnTo>
-                  <a:lnTo>
-                    <a:pt x="3652748" y="2581396"/>
-                  </a:lnTo>
-                  <a:lnTo>
-                    <a:pt x="3724371" y="2545279"/>
-                  </a:lnTo>
-                  <a:lnTo>
-                    <a:pt x="3795993" y="2507944"/>
-                  </a:lnTo>
-                  <a:lnTo>
-                    <a:pt x="3867616" y="2469351"/>
-                  </a:lnTo>
-                  <a:lnTo>
-                    <a:pt x="3939238" y="2429456"/>
-                  </a:lnTo>
-                  <a:lnTo>
-                    <a:pt x="4010861" y="2388217"/>
-                  </a:lnTo>
-                  <a:lnTo>
-                    <a:pt x="4082483" y="2345587"/>
-                  </a:lnTo>
-                  <a:lnTo>
-                    <a:pt x="4154106" y="2301520"/>
-                  </a:lnTo>
-                  <a:lnTo>
-                    <a:pt x="4225729" y="2255967"/>
-                  </a:lnTo>
-                  <a:lnTo>
-                    <a:pt x="4297351" y="2208878"/>
-                  </a:lnTo>
-                  <a:lnTo>
-                    <a:pt x="4368974" y="2160202"/>
-                  </a:lnTo>
-                  <a:lnTo>
-                    <a:pt x="4440596" y="2109884"/>
-                  </a:lnTo>
-                  <a:lnTo>
-                    <a:pt x="4512219" y="2057870"/>
-                  </a:lnTo>
-                  <a:lnTo>
-                    <a:pt x="4583841" y="2004103"/>
-                  </a:lnTo>
-                  <a:lnTo>
-                    <a:pt x="4655464" y="1948522"/>
-                  </a:lnTo>
-                  <a:lnTo>
-                    <a:pt x="4727086" y="1891068"/>
-                  </a:lnTo>
-                  <a:lnTo>
-                    <a:pt x="4798709" y="1831677"/>
-                  </a:lnTo>
-                  <a:lnTo>
-                    <a:pt x="4870331" y="1770283"/>
-                  </a:lnTo>
-                  <a:lnTo>
-                    <a:pt x="4941954" y="1706820"/>
-                  </a:lnTo>
-                  <a:lnTo>
-                    <a:pt x="5013576" y="1641216"/>
-                  </a:lnTo>
-                  <a:lnTo>
-                    <a:pt x="5085199" y="1573401"/>
-                  </a:lnTo>
-                  <a:lnTo>
-                    <a:pt x="5156821" y="1503300"/>
-                  </a:lnTo>
-                  <a:lnTo>
-                    <a:pt x="5228444" y="1430835"/>
-                  </a:lnTo>
-                  <a:lnTo>
-                    <a:pt x="5300066" y="1355927"/>
-                  </a:lnTo>
-                  <a:lnTo>
-                    <a:pt x="5371689" y="1278494"/>
-                  </a:lnTo>
-                  <a:lnTo>
-                    <a:pt x="5443311" y="1198450"/>
-                  </a:lnTo>
-                  <a:lnTo>
-                    <a:pt x="5514934" y="1115707"/>
-                  </a:lnTo>
-                  <a:lnTo>
-                    <a:pt x="5586557" y="1030174"/>
-                  </a:lnTo>
-                  <a:lnTo>
-                    <a:pt x="5658179" y="941758"/>
-                  </a:lnTo>
-                  <a:lnTo>
-                    <a:pt x="5729802" y="850361"/>
-                  </a:lnTo>
-                  <a:lnTo>
-                    <a:pt x="5801424" y="755882"/>
-                  </a:lnTo>
-                  <a:lnTo>
-                    <a:pt x="5873047" y="658219"/>
-                  </a:lnTo>
-                  <a:lnTo>
-                    <a:pt x="5944669" y="557262"/>
-                  </a:lnTo>
-                  <a:lnTo>
-                    <a:pt x="6016292" y="452902"/>
-                  </a:lnTo>
-                  <a:lnTo>
-                    <a:pt x="6087914" y="345023"/>
-                  </a:lnTo>
-                  <a:lnTo>
-                    <a:pt x="6159537" y="233507"/>
-                  </a:lnTo>
-                  <a:lnTo>
-                    <a:pt x="6231159" y="118231"/>
-                  </a:lnTo>
-                  <a:lnTo>
-                    <a:pt x="6302222" y="0"/>
+                    <a:pt x="71622" y="1145423"/>
+                  </a:lnTo>
+                  <a:lnTo>
+                    <a:pt x="143245" y="1206199"/>
+                  </a:lnTo>
+                  <a:lnTo>
+                    <a:pt x="214867" y="1265501"/>
+                  </a:lnTo>
+                  <a:lnTo>
+                    <a:pt x="286490" y="1323366"/>
+                  </a:lnTo>
+                  <a:lnTo>
+                    <a:pt x="358112" y="1379828"/>
+                  </a:lnTo>
+                  <a:lnTo>
+                    <a:pt x="429735" y="1434922"/>
+                  </a:lnTo>
+                  <a:lnTo>
+                    <a:pt x="501357" y="1488680"/>
+                  </a:lnTo>
+                  <a:lnTo>
+                    <a:pt x="572980" y="1541135"/>
+                  </a:lnTo>
+                  <a:lnTo>
+                    <a:pt x="644602" y="1592318"/>
+                  </a:lnTo>
+                  <a:lnTo>
+                    <a:pt x="716225" y="1642261"/>
+                  </a:lnTo>
+                  <a:lnTo>
+                    <a:pt x="787847" y="1690993"/>
+                  </a:lnTo>
+                  <a:lnTo>
+                    <a:pt x="859470" y="1738544"/>
+                  </a:lnTo>
+                  <a:lnTo>
+                    <a:pt x="931092" y="1784942"/>
+                  </a:lnTo>
+                  <a:lnTo>
+                    <a:pt x="1002715" y="1830215"/>
+                  </a:lnTo>
+                  <a:lnTo>
+                    <a:pt x="1074337" y="1874391"/>
+                  </a:lnTo>
+                  <a:lnTo>
+                    <a:pt x="1145960" y="1917497"/>
+                  </a:lnTo>
+                  <a:lnTo>
+                    <a:pt x="1217582" y="1959557"/>
+                  </a:lnTo>
+                  <a:lnTo>
+                    <a:pt x="1289205" y="2000598"/>
+                  </a:lnTo>
+                  <a:lnTo>
+                    <a:pt x="1360827" y="2040644"/>
+                  </a:lnTo>
+                  <a:lnTo>
+                    <a:pt x="1432450" y="2079719"/>
+                  </a:lnTo>
+                  <a:lnTo>
+                    <a:pt x="1504073" y="2117847"/>
+                  </a:lnTo>
+                  <a:lnTo>
+                    <a:pt x="1575695" y="2155051"/>
+                  </a:lnTo>
+                  <a:lnTo>
+                    <a:pt x="1647318" y="2191353"/>
+                  </a:lnTo>
+                  <a:lnTo>
+                    <a:pt x="1718940" y="2226775"/>
+                  </a:lnTo>
+                  <a:lnTo>
+                    <a:pt x="1790563" y="2261338"/>
+                  </a:lnTo>
+                  <a:lnTo>
+                    <a:pt x="1862185" y="2295064"/>
+                  </a:lnTo>
+                  <a:lnTo>
+                    <a:pt x="1933808" y="2327972"/>
+                  </a:lnTo>
+                  <a:lnTo>
+                    <a:pt x="2005430" y="2360082"/>
+                  </a:lnTo>
+                  <a:lnTo>
+                    <a:pt x="2077053" y="2391414"/>
+                  </a:lnTo>
+                  <a:lnTo>
+                    <a:pt x="2148675" y="2421987"/>
+                  </a:lnTo>
+                  <a:lnTo>
+                    <a:pt x="2220298" y="2451818"/>
+                  </a:lnTo>
+                  <a:lnTo>
+                    <a:pt x="2291920" y="2480926"/>
+                  </a:lnTo>
+                  <a:lnTo>
+                    <a:pt x="2363543" y="2509329"/>
+                  </a:lnTo>
+                  <a:lnTo>
+                    <a:pt x="2435165" y="2537043"/>
+                  </a:lnTo>
+                  <a:lnTo>
+                    <a:pt x="2506788" y="2564085"/>
+                  </a:lnTo>
+                  <a:lnTo>
+                    <a:pt x="2578410" y="2590472"/>
+                  </a:lnTo>
+                  <a:lnTo>
+                    <a:pt x="2650033" y="2616220"/>
+                  </a:lnTo>
+                  <a:lnTo>
+                    <a:pt x="2721655" y="2641343"/>
+                  </a:lnTo>
+                  <a:lnTo>
+                    <a:pt x="2793278" y="2665857"/>
+                  </a:lnTo>
+                  <a:lnTo>
+                    <a:pt x="2864901" y="2689777"/>
+                  </a:lnTo>
+                  <a:lnTo>
+                    <a:pt x="2936523" y="2713117"/>
+                  </a:lnTo>
+                  <a:lnTo>
+                    <a:pt x="3008146" y="2735891"/>
+                  </a:lnTo>
+                  <a:lnTo>
+                    <a:pt x="3079768" y="2758114"/>
+                  </a:lnTo>
+                  <a:lnTo>
+                    <a:pt x="3151391" y="2779797"/>
+                  </a:lnTo>
+                  <a:lnTo>
+                    <a:pt x="3223013" y="2758281"/>
+                  </a:lnTo>
+                  <a:lnTo>
+                    <a:pt x="3294636" y="2728405"/>
+                  </a:lnTo>
+                  <a:lnTo>
+                    <a:pt x="3366258" y="2697531"/>
+                  </a:lnTo>
+                  <a:lnTo>
+                    <a:pt x="3437881" y="2665625"/>
+                  </a:lnTo>
+                  <a:lnTo>
+                    <a:pt x="3509503" y="2632653"/>
+                  </a:lnTo>
+                  <a:lnTo>
+                    <a:pt x="3581126" y="2598580"/>
+                  </a:lnTo>
+                  <a:lnTo>
+                    <a:pt x="3652748" y="2563369"/>
+                  </a:lnTo>
+                  <a:lnTo>
+                    <a:pt x="3724371" y="2526982"/>
+                  </a:lnTo>
+                  <a:lnTo>
+                    <a:pt x="3795993" y="2489379"/>
+                  </a:lnTo>
+                  <a:lnTo>
+                    <a:pt x="3867616" y="2450520"/>
+                  </a:lnTo>
+                  <a:lnTo>
+                    <a:pt x="3939238" y="2410363"/>
+                  </a:lnTo>
+                  <a:lnTo>
+                    <a:pt x="4010861" y="2368864"/>
+                  </a:lnTo>
+                  <a:lnTo>
+                    <a:pt x="4082483" y="2325979"/>
+                  </a:lnTo>
+                  <a:lnTo>
+                    <a:pt x="4154106" y="2281662"/>
+                  </a:lnTo>
+                  <a:lnTo>
+                    <a:pt x="4225729" y="2235864"/>
+                  </a:lnTo>
+                  <a:lnTo>
+                    <a:pt x="4297351" y="2188536"/>
+                  </a:lnTo>
+                  <a:lnTo>
+                    <a:pt x="4368974" y="2139627"/>
+                  </a:lnTo>
+                  <a:lnTo>
+                    <a:pt x="4440596" y="2089085"/>
+                  </a:lnTo>
+                  <a:lnTo>
+                    <a:pt x="4512219" y="2036854"/>
+                  </a:lnTo>
+                  <a:lnTo>
+                    <a:pt x="4583841" y="1982878"/>
+                  </a:lnTo>
+                  <a:lnTo>
+                    <a:pt x="4655464" y="1927099"/>
+                  </a:lnTo>
+                  <a:lnTo>
+                    <a:pt x="4727086" y="1869457"/>
+                  </a:lnTo>
+                  <a:lnTo>
+                    <a:pt x="4798709" y="1809889"/>
+                  </a:lnTo>
+                  <a:lnTo>
+                    <a:pt x="4870331" y="1748332"/>
+                  </a:lnTo>
+                  <a:lnTo>
+                    <a:pt x="4941954" y="1684718"/>
+                  </a:lnTo>
+                  <a:lnTo>
+                    <a:pt x="5013576" y="1618979"/>
+                  </a:lnTo>
+                  <a:lnTo>
+                    <a:pt x="5085199" y="1551044"/>
+                  </a:lnTo>
+                  <a:lnTo>
+                    <a:pt x="5156821" y="1480840"/>
+                  </a:lnTo>
+                  <a:lnTo>
+                    <a:pt x="5228444" y="1408290"/>
+                  </a:lnTo>
+                  <a:lnTo>
+                    <a:pt x="5300066" y="1333317"/>
+                  </a:lnTo>
+                  <a:lnTo>
+                    <a:pt x="5371689" y="1255840"/>
+                  </a:lnTo>
+                  <a:lnTo>
+                    <a:pt x="5443311" y="1175774"/>
+                  </a:lnTo>
+                  <a:lnTo>
+                    <a:pt x="5514934" y="1093034"/>
+                  </a:lnTo>
+                  <a:lnTo>
+                    <a:pt x="5586557" y="1007529"/>
+                  </a:lnTo>
+                  <a:lnTo>
+                    <a:pt x="5658179" y="919169"/>
+                  </a:lnTo>
+                  <a:lnTo>
+                    <a:pt x="5729802" y="827857"/>
+                  </a:lnTo>
+                  <a:lnTo>
+                    <a:pt x="5801424" y="733494"/>
+                  </a:lnTo>
+                  <a:lnTo>
+                    <a:pt x="5873047" y="635979"/>
+                  </a:lnTo>
+                  <a:lnTo>
+                    <a:pt x="5944669" y="535207"/>
+                  </a:lnTo>
+                  <a:lnTo>
+                    <a:pt x="6016292" y="431068"/>
+                  </a:lnTo>
+                  <a:lnTo>
+                    <a:pt x="6087914" y="323451"/>
+                  </a:lnTo>
+                  <a:lnTo>
+                    <a:pt x="6159537" y="212239"/>
+                  </a:lnTo>
+                  <a:lnTo>
+                    <a:pt x="6231159" y="97312"/>
+                  </a:lnTo>
+                  <a:lnTo>
+                    <a:pt x="6289844" y="0"/>
                   </a:lnTo>
                   <a:lnTo>
                     <a:pt x="7090630" y="0"/>
                   </a:lnTo>
                   <a:lnTo>
-                    <a:pt x="7090630" y="3410733"/>
-                  </a:lnTo>
-                  <a:lnTo>
-                    <a:pt x="7019007" y="3404963"/>
-                  </a:lnTo>
-                  <a:lnTo>
-                    <a:pt x="6947385" y="3399056"/>
-                  </a:lnTo>
-                  <a:lnTo>
-                    <a:pt x="6875762" y="3393008"/>
-                  </a:lnTo>
-                  <a:lnTo>
-                    <a:pt x="6804139" y="3386815"/>
-                  </a:lnTo>
-                  <a:lnTo>
-                    <a:pt x="6732517" y="3380475"/>
-                  </a:lnTo>
-                  <a:lnTo>
-                    <a:pt x="6660894" y="3373984"/>
-                  </a:lnTo>
-                  <a:lnTo>
-                    <a:pt x="6589272" y="3367338"/>
-                  </a:lnTo>
-                  <a:lnTo>
-                    <a:pt x="6517649" y="3360533"/>
-                  </a:lnTo>
-                  <a:lnTo>
-                    <a:pt x="6446027" y="3353566"/>
-                  </a:lnTo>
-                  <a:lnTo>
-                    <a:pt x="6374404" y="3346433"/>
-                  </a:lnTo>
-                  <a:lnTo>
-                    <a:pt x="6302782" y="3339130"/>
-                  </a:lnTo>
-                  <a:lnTo>
-                    <a:pt x="6231159" y="3331653"/>
-                  </a:lnTo>
-                  <a:lnTo>
-                    <a:pt x="6159537" y="3323997"/>
-                  </a:lnTo>
-                  <a:lnTo>
-                    <a:pt x="6087914" y="3316159"/>
-                  </a:lnTo>
-                  <a:lnTo>
-                    <a:pt x="6016292" y="3308133"/>
-                  </a:lnTo>
-                  <a:lnTo>
-                    <a:pt x="5944669" y="3299917"/>
-                  </a:lnTo>
-                  <a:lnTo>
-                    <a:pt x="5873047" y="3291504"/>
-                  </a:lnTo>
-                  <a:lnTo>
-                    <a:pt x="5801424" y="3282891"/>
-                  </a:lnTo>
-                  <a:lnTo>
-                    <a:pt x="5729802" y="3274072"/>
-                  </a:lnTo>
-                  <a:lnTo>
-                    <a:pt x="5658179" y="3265043"/>
-                  </a:lnTo>
-                  <a:lnTo>
-                    <a:pt x="5586557" y="3255798"/>
-                  </a:lnTo>
-                  <a:lnTo>
-                    <a:pt x="5514934" y="3246334"/>
-                  </a:lnTo>
-                  <a:lnTo>
-                    <a:pt x="5443311" y="3236643"/>
-                  </a:lnTo>
-                  <a:lnTo>
-                    <a:pt x="5371689" y="3226721"/>
-                  </a:lnTo>
-                  <a:lnTo>
-                    <a:pt x="5300066" y="3216563"/>
-                  </a:lnTo>
-                  <a:lnTo>
-                    <a:pt x="5228444" y="3206162"/>
-                  </a:lnTo>
-                  <a:lnTo>
-                    <a:pt x="5156821" y="3195513"/>
-                  </a:lnTo>
-                  <a:lnTo>
-                    <a:pt x="5085199" y="3184611"/>
-                  </a:lnTo>
-                  <a:lnTo>
-                    <a:pt x="5013576" y="3173448"/>
-                  </a:lnTo>
-                  <a:lnTo>
-                    <a:pt x="4941954" y="3162019"/>
-                  </a:lnTo>
-                  <a:lnTo>
-                    <a:pt x="4870331" y="3150318"/>
-                  </a:lnTo>
-                  <a:lnTo>
-                    <a:pt x="4798709" y="3138337"/>
-                  </a:lnTo>
-                  <a:lnTo>
-                    <a:pt x="4727086" y="3126071"/>
-                  </a:lnTo>
-                  <a:lnTo>
-                    <a:pt x="4655464" y="3113512"/>
-                  </a:lnTo>
-                  <a:lnTo>
-                    <a:pt x="4583841" y="3100653"/>
-                  </a:lnTo>
-                  <a:lnTo>
-                    <a:pt x="4512219" y="3087488"/>
-                  </a:lnTo>
-                  <a:lnTo>
-                    <a:pt x="4440596" y="3074009"/>
-                  </a:lnTo>
-                  <a:lnTo>
-                    <a:pt x="4368974" y="3060208"/>
-                  </a:lnTo>
-                  <a:lnTo>
-                    <a:pt x="4297351" y="3046078"/>
-                  </a:lnTo>
-                  <a:lnTo>
-                    <a:pt x="4225729" y="3031612"/>
-                  </a:lnTo>
-                  <a:lnTo>
-                    <a:pt x="4154106" y="3016800"/>
-                  </a:lnTo>
-                  <a:lnTo>
-                    <a:pt x="4082483" y="3001635"/>
-                  </a:lnTo>
-                  <a:lnTo>
-                    <a:pt x="4010861" y="2986108"/>
-                  </a:lnTo>
-                  <a:lnTo>
-                    <a:pt x="3939238" y="2970211"/>
-                  </a:lnTo>
-                  <a:lnTo>
-                    <a:pt x="3867616" y="2953935"/>
-                  </a:lnTo>
-                  <a:lnTo>
-                    <a:pt x="3795993" y="2937270"/>
-                  </a:lnTo>
-                  <a:lnTo>
-                    <a:pt x="3724371" y="2920208"/>
-                  </a:lnTo>
-                  <a:lnTo>
-                    <a:pt x="3652748" y="2902740"/>
-                  </a:lnTo>
-                  <a:lnTo>
-                    <a:pt x="3581126" y="2884854"/>
-                  </a:lnTo>
-                  <a:lnTo>
-                    <a:pt x="3509503" y="2866542"/>
-                  </a:lnTo>
-                  <a:lnTo>
-                    <a:pt x="3437881" y="2847793"/>
-                  </a:lnTo>
-                  <a:lnTo>
-                    <a:pt x="3366258" y="2828597"/>
-                  </a:lnTo>
-                  <a:lnTo>
-                    <a:pt x="3294636" y="2808944"/>
-                  </a:lnTo>
-                  <a:lnTo>
-                    <a:pt x="3223013" y="2788821"/>
-                  </a:lnTo>
-                  <a:lnTo>
-                    <a:pt x="3151391" y="2803298"/>
-                  </a:lnTo>
-                  <a:lnTo>
-                    <a:pt x="3079768" y="2830999"/>
-                  </a:lnTo>
-                  <a:lnTo>
-                    <a:pt x="3008146" y="2857797"/>
-                  </a:lnTo>
-                  <a:lnTo>
-                    <a:pt x="2936523" y="2883722"/>
-                  </a:lnTo>
-                  <a:lnTo>
-                    <a:pt x="2864901" y="2908800"/>
-                  </a:lnTo>
-                  <a:lnTo>
-                    <a:pt x="2793278" y="2933061"/>
-                  </a:lnTo>
-                  <a:lnTo>
-                    <a:pt x="2721655" y="2956530"/>
-                  </a:lnTo>
-                  <a:lnTo>
-                    <a:pt x="2650033" y="2979234"/>
-                  </a:lnTo>
-                  <a:lnTo>
-                    <a:pt x="2578410" y="3001197"/>
-                  </a:lnTo>
-                  <a:lnTo>
-                    <a:pt x="2506788" y="3022445"/>
-                  </a:lnTo>
-                  <a:lnTo>
-                    <a:pt x="2435165" y="3042999"/>
-                  </a:lnTo>
-                  <a:lnTo>
-                    <a:pt x="2363543" y="3062882"/>
-                  </a:lnTo>
-                  <a:lnTo>
-                    <a:pt x="2291920" y="3082118"/>
-                  </a:lnTo>
-                  <a:lnTo>
-                    <a:pt x="2220298" y="3100725"/>
-                  </a:lnTo>
-                  <a:lnTo>
-                    <a:pt x="2148675" y="3118726"/>
-                  </a:lnTo>
-                  <a:lnTo>
-                    <a:pt x="2077053" y="3136140"/>
-                  </a:lnTo>
-                  <a:lnTo>
-                    <a:pt x="2005430" y="3152986"/>
-                  </a:lnTo>
-                  <a:lnTo>
-                    <a:pt x="1933808" y="3169282"/>
-                  </a:lnTo>
-                  <a:lnTo>
-                    <a:pt x="1862185" y="3185047"/>
-                  </a:lnTo>
-                  <a:lnTo>
-                    <a:pt x="1790563" y="3200298"/>
-                  </a:lnTo>
-                  <a:lnTo>
-                    <a:pt x="1718940" y="3215051"/>
-                  </a:lnTo>
-                  <a:lnTo>
-                    <a:pt x="1647318" y="3229324"/>
-                  </a:lnTo>
-                  <a:lnTo>
-                    <a:pt x="1575695" y="3243130"/>
-                  </a:lnTo>
-                  <a:lnTo>
-                    <a:pt x="1504073" y="3256487"/>
-                  </a:lnTo>
-                  <a:lnTo>
-                    <a:pt x="1432450" y="3269407"/>
-                  </a:lnTo>
-                  <a:lnTo>
-                    <a:pt x="1360827" y="3281907"/>
-                  </a:lnTo>
-                  <a:lnTo>
-                    <a:pt x="1289205" y="3293998"/>
-                  </a:lnTo>
-                  <a:lnTo>
-                    <a:pt x="1217582" y="3305696"/>
-                  </a:lnTo>
-                  <a:lnTo>
-                    <a:pt x="1145960" y="3317012"/>
-                  </a:lnTo>
-                  <a:lnTo>
-                    <a:pt x="1074337" y="3327958"/>
-                  </a:lnTo>
-                  <a:lnTo>
-                    <a:pt x="1002715" y="3338548"/>
-                  </a:lnTo>
-                  <a:lnTo>
-                    <a:pt x="931092" y="3348792"/>
-                  </a:lnTo>
-                  <a:lnTo>
-                    <a:pt x="859470" y="3358702"/>
-                  </a:lnTo>
-                  <a:lnTo>
-                    <a:pt x="787847" y="3368289"/>
-                  </a:lnTo>
-                  <a:lnTo>
-                    <a:pt x="716225" y="3377564"/>
-                  </a:lnTo>
-                  <a:lnTo>
-                    <a:pt x="644602" y="3386535"/>
-                  </a:lnTo>
-                  <a:lnTo>
-                    <a:pt x="572980" y="3395215"/>
-                  </a:lnTo>
-                  <a:lnTo>
-                    <a:pt x="501357" y="3403611"/>
-                  </a:lnTo>
-                  <a:lnTo>
-                    <a:pt x="429735" y="3411733"/>
-                  </a:lnTo>
-                  <a:lnTo>
-                    <a:pt x="358112" y="3419590"/>
-                  </a:lnTo>
-                  <a:lnTo>
-                    <a:pt x="286490" y="3427191"/>
-                  </a:lnTo>
-                  <a:lnTo>
-                    <a:pt x="214867" y="3434545"/>
-                  </a:lnTo>
-                  <a:lnTo>
-                    <a:pt x="143245" y="3441658"/>
-                  </a:lnTo>
-                  <a:lnTo>
-                    <a:pt x="71622" y="3448539"/>
-                  </a:lnTo>
-                  <a:lnTo>
-                    <a:pt x="0" y="3455196"/>
+                    <a:pt x="7090630" y="3426284"/>
+                  </a:lnTo>
+                  <a:lnTo>
+                    <a:pt x="7019007" y="3420661"/>
+                  </a:lnTo>
+                  <a:lnTo>
+                    <a:pt x="6947385" y="3414898"/>
+                  </a:lnTo>
+                  <a:lnTo>
+                    <a:pt x="6875762" y="3408992"/>
+                  </a:lnTo>
+                  <a:lnTo>
+                    <a:pt x="6804139" y="3402939"/>
+                  </a:lnTo>
+                  <a:lnTo>
+                    <a:pt x="6732517" y="3396736"/>
+                  </a:lnTo>
+                  <a:lnTo>
+                    <a:pt x="6660894" y="3390378"/>
+                  </a:lnTo>
+                  <a:lnTo>
+                    <a:pt x="6589272" y="3383863"/>
+                  </a:lnTo>
+                  <a:lnTo>
+                    <a:pt x="6517649" y="3377186"/>
+                  </a:lnTo>
+                  <a:lnTo>
+                    <a:pt x="6446027" y="3370343"/>
+                  </a:lnTo>
+                  <a:lnTo>
+                    <a:pt x="6374404" y="3363330"/>
+                  </a:lnTo>
+                  <a:lnTo>
+                    <a:pt x="6302782" y="3356143"/>
+                  </a:lnTo>
+                  <a:lnTo>
+                    <a:pt x="6231159" y="3348777"/>
+                  </a:lnTo>
+                  <a:lnTo>
+                    <a:pt x="6159537" y="3341228"/>
+                  </a:lnTo>
+                  <a:lnTo>
+                    <a:pt x="6087914" y="3333492"/>
+                  </a:lnTo>
+                  <a:lnTo>
+                    <a:pt x="6016292" y="3325563"/>
+                  </a:lnTo>
+                  <a:lnTo>
+                    <a:pt x="5944669" y="3317438"/>
+                  </a:lnTo>
+                  <a:lnTo>
+                    <a:pt x="5873047" y="3309110"/>
+                  </a:lnTo>
+                  <a:lnTo>
+                    <a:pt x="5801424" y="3300576"/>
+                  </a:lnTo>
+                  <a:lnTo>
+                    <a:pt x="5729802" y="3291830"/>
+                  </a:lnTo>
+                  <a:lnTo>
+                    <a:pt x="5658179" y="3282867"/>
+                  </a:lnTo>
+                  <a:lnTo>
+                    <a:pt x="5586557" y="3273680"/>
+                  </a:lnTo>
+                  <a:lnTo>
+                    <a:pt x="5514934" y="3264266"/>
+                  </a:lnTo>
+                  <a:lnTo>
+                    <a:pt x="5443311" y="3254618"/>
+                  </a:lnTo>
+                  <a:lnTo>
+                    <a:pt x="5371689" y="3244730"/>
+                  </a:lnTo>
+                  <a:lnTo>
+                    <a:pt x="5300066" y="3234596"/>
+                  </a:lnTo>
+                  <a:lnTo>
+                    <a:pt x="5228444" y="3224211"/>
+                  </a:lnTo>
+                  <a:lnTo>
+                    <a:pt x="5156821" y="3213568"/>
+                  </a:lnTo>
+                  <a:lnTo>
+                    <a:pt x="5085199" y="3202660"/>
+                  </a:lnTo>
+                  <a:lnTo>
+                    <a:pt x="5013576" y="3191481"/>
+                  </a:lnTo>
+                  <a:lnTo>
+                    <a:pt x="4941954" y="3180025"/>
+                  </a:lnTo>
+                  <a:lnTo>
+                    <a:pt x="4870331" y="3168284"/>
+                  </a:lnTo>
+                  <a:lnTo>
+                    <a:pt x="4798709" y="3156251"/>
+                  </a:lnTo>
+                  <a:lnTo>
+                    <a:pt x="4727086" y="3143920"/>
+                  </a:lnTo>
+                  <a:lnTo>
+                    <a:pt x="4655464" y="3131282"/>
+                  </a:lnTo>
+                  <a:lnTo>
+                    <a:pt x="4583841" y="3118330"/>
+                  </a:lnTo>
+                  <a:lnTo>
+                    <a:pt x="4512219" y="3105056"/>
+                  </a:lnTo>
+                  <a:lnTo>
+                    <a:pt x="4440596" y="3091453"/>
+                  </a:lnTo>
+                  <a:lnTo>
+                    <a:pt x="4368974" y="3077512"/>
+                  </a:lnTo>
+                  <a:lnTo>
+                    <a:pt x="4297351" y="3063224"/>
+                  </a:lnTo>
+                  <a:lnTo>
+                    <a:pt x="4225729" y="3048581"/>
+                  </a:lnTo>
+                  <a:lnTo>
+                    <a:pt x="4154106" y="3033575"/>
+                  </a:lnTo>
+                  <a:lnTo>
+                    <a:pt x="4082483" y="3018196"/>
+                  </a:lnTo>
+                  <a:lnTo>
+                    <a:pt x="4010861" y="3002435"/>
+                  </a:lnTo>
+                  <a:lnTo>
+                    <a:pt x="3939238" y="2986282"/>
+                  </a:lnTo>
+                  <a:lnTo>
+                    <a:pt x="3867616" y="2969728"/>
+                  </a:lnTo>
+                  <a:lnTo>
+                    <a:pt x="3795993" y="2952763"/>
+                  </a:lnTo>
+                  <a:lnTo>
+                    <a:pt x="3724371" y="2935376"/>
+                  </a:lnTo>
+                  <a:lnTo>
+                    <a:pt x="3652748" y="2917557"/>
+                  </a:lnTo>
+                  <a:lnTo>
+                    <a:pt x="3581126" y="2899296"/>
+                  </a:lnTo>
+                  <a:lnTo>
+                    <a:pt x="3509503" y="2880581"/>
+                  </a:lnTo>
+                  <a:lnTo>
+                    <a:pt x="3437881" y="2861401"/>
+                  </a:lnTo>
+                  <a:lnTo>
+                    <a:pt x="3366258" y="2841745"/>
+                  </a:lnTo>
+                  <a:lnTo>
+                    <a:pt x="3294636" y="2821600"/>
+                  </a:lnTo>
+                  <a:lnTo>
+                    <a:pt x="3223013" y="2800955"/>
+                  </a:lnTo>
+                  <a:lnTo>
+                    <a:pt x="3151391" y="2787192"/>
+                  </a:lnTo>
+                  <a:lnTo>
+                    <a:pt x="3079768" y="2815168"/>
+                  </a:lnTo>
+                  <a:lnTo>
+                    <a:pt x="3008146" y="2842240"/>
+                  </a:lnTo>
+                  <a:lnTo>
+                    <a:pt x="2936523" y="2868436"/>
+                  </a:lnTo>
+                  <a:lnTo>
+                    <a:pt x="2864901" y="2893786"/>
+                  </a:lnTo>
+                  <a:lnTo>
+                    <a:pt x="2793278" y="2918316"/>
+                  </a:lnTo>
+                  <a:lnTo>
+                    <a:pt x="2721655" y="2942054"/>
+                  </a:lnTo>
+                  <a:lnTo>
+                    <a:pt x="2650033" y="2965024"/>
+                  </a:lnTo>
+                  <a:lnTo>
+                    <a:pt x="2578410" y="2987251"/>
+                  </a:lnTo>
+                  <a:lnTo>
+                    <a:pt x="2506788" y="3008760"/>
+                  </a:lnTo>
+                  <a:lnTo>
+                    <a:pt x="2435165" y="3029574"/>
+                  </a:lnTo>
+                  <a:lnTo>
+                    <a:pt x="2363543" y="3049715"/>
+                  </a:lnTo>
+                  <a:lnTo>
+                    <a:pt x="2291920" y="3069205"/>
+                  </a:lnTo>
+                  <a:lnTo>
+                    <a:pt x="2220298" y="3088065"/>
+                  </a:lnTo>
+                  <a:lnTo>
+                    <a:pt x="2148675" y="3106315"/>
+                  </a:lnTo>
+                  <a:lnTo>
+                    <a:pt x="2077053" y="3123975"/>
+                  </a:lnTo>
+                  <a:lnTo>
+                    <a:pt x="2005430" y="3141065"/>
+                  </a:lnTo>
+                  <a:lnTo>
+                    <a:pt x="1933808" y="3157601"/>
+                  </a:lnTo>
+                  <a:lnTo>
+                    <a:pt x="1862185" y="3173604"/>
+                  </a:lnTo>
+                  <a:lnTo>
+                    <a:pt x="1790563" y="3189089"/>
+                  </a:lnTo>
+                  <a:lnTo>
+                    <a:pt x="1718940" y="3204074"/>
+                  </a:lnTo>
+                  <a:lnTo>
+                    <a:pt x="1647318" y="3218574"/>
+                  </a:lnTo>
+                  <a:lnTo>
+                    <a:pt x="1575695" y="3232605"/>
+                  </a:lnTo>
+                  <a:lnTo>
+                    <a:pt x="1504073" y="3246183"/>
+                  </a:lnTo>
+                  <a:lnTo>
+                    <a:pt x="1432450" y="3259322"/>
+                  </a:lnTo>
+                  <a:lnTo>
+                    <a:pt x="1360827" y="3272036"/>
+                  </a:lnTo>
+                  <a:lnTo>
+                    <a:pt x="1289205" y="3284340"/>
+                  </a:lnTo>
+                  <a:lnTo>
+                    <a:pt x="1217582" y="3296245"/>
+                  </a:lnTo>
+                  <a:lnTo>
+                    <a:pt x="1145960" y="3307766"/>
+                  </a:lnTo>
+                  <a:lnTo>
+                    <a:pt x="1074337" y="3318914"/>
+                  </a:lnTo>
+                  <a:lnTo>
+                    <a:pt x="1002715" y="3329702"/>
+                  </a:lnTo>
+                  <a:lnTo>
+                    <a:pt x="931092" y="3340141"/>
+                  </a:lnTo>
+                  <a:lnTo>
+                    <a:pt x="859470" y="3350243"/>
+                  </a:lnTo>
+                  <a:lnTo>
+                    <a:pt x="787847" y="3360018"/>
+                  </a:lnTo>
+                  <a:lnTo>
+                    <a:pt x="716225" y="3369477"/>
+                  </a:lnTo>
+                  <a:lnTo>
+                    <a:pt x="644602" y="3378631"/>
+                  </a:lnTo>
+                  <a:lnTo>
+                    <a:pt x="572980" y="3387488"/>
+                  </a:lnTo>
+                  <a:lnTo>
+                    <a:pt x="501357" y="3396060"/>
+                  </a:lnTo>
+                  <a:lnTo>
+                    <a:pt x="429735" y="3404354"/>
+                  </a:lnTo>
+                  <a:lnTo>
+                    <a:pt x="358112" y="3412380"/>
+                  </a:lnTo>
+                  <a:lnTo>
+                    <a:pt x="286490" y="3420146"/>
+                  </a:lnTo>
+                  <a:lnTo>
+                    <a:pt x="214867" y="3427662"/>
+                  </a:lnTo>
+                  <a:lnTo>
+                    <a:pt x="143245" y="3434935"/>
+                  </a:lnTo>
+                  <a:lnTo>
+                    <a:pt x="71622" y="3441972"/>
+                  </a:lnTo>
+                  <a:lnTo>
+                    <a:pt x="0" y="3448782"/>
                   </a:lnTo>
                   <a:close/>
                 </a:path>
@@ -3561,278 +3561,278 @@
           <p:spPr>
             <a:xfrm>
               <a:off x="1172049" y="1896563"/>
-              <a:ext cx="6302222" cy="2774662"/>
+              <a:ext cx="6289844" cy="2779797"/>
             </a:xfrm>
             <a:custGeom>
               <a:avLst/>
               <a:pathLst>
-                <a:path w="6302222" h="2774662">
+                <a:path w="6289844" h="2779797">
                   <a:moveTo>
-                    <a:pt x="0" y="1157672"/>
+                    <a:pt x="0" y="1083138"/>
                   </a:moveTo>
                   <a:lnTo>
-                    <a:pt x="71622" y="1215792"/>
-                  </a:lnTo>
-                  <a:lnTo>
-                    <a:pt x="143245" y="1272557"/>
-                  </a:lnTo>
-                  <a:lnTo>
-                    <a:pt x="214867" y="1328001"/>
-                  </a:lnTo>
-                  <a:lnTo>
-                    <a:pt x="286490" y="1382153"/>
-                  </a:lnTo>
-                  <a:lnTo>
-                    <a:pt x="358112" y="1435043"/>
-                  </a:lnTo>
-                  <a:lnTo>
-                    <a:pt x="429735" y="1486702"/>
-                  </a:lnTo>
-                  <a:lnTo>
-                    <a:pt x="501357" y="1537157"/>
-                  </a:lnTo>
-                  <a:lnTo>
-                    <a:pt x="572980" y="1586436"/>
-                  </a:lnTo>
-                  <a:lnTo>
-                    <a:pt x="644602" y="1634568"/>
-                  </a:lnTo>
-                  <a:lnTo>
-                    <a:pt x="716225" y="1681579"/>
-                  </a:lnTo>
-                  <a:lnTo>
-                    <a:pt x="787847" y="1727494"/>
-                  </a:lnTo>
-                  <a:lnTo>
-                    <a:pt x="859470" y="1772340"/>
-                  </a:lnTo>
-                  <a:lnTo>
-                    <a:pt x="931092" y="1816141"/>
-                  </a:lnTo>
-                  <a:lnTo>
-                    <a:pt x="1002715" y="1858922"/>
-                  </a:lnTo>
-                  <a:lnTo>
-                    <a:pt x="1074337" y="1900706"/>
-                  </a:lnTo>
-                  <a:lnTo>
-                    <a:pt x="1145960" y="1941517"/>
-                  </a:lnTo>
-                  <a:lnTo>
-                    <a:pt x="1217582" y="1981377"/>
-                  </a:lnTo>
-                  <a:lnTo>
-                    <a:pt x="1289205" y="2020309"/>
-                  </a:lnTo>
-                  <a:lnTo>
-                    <a:pt x="1360827" y="2058334"/>
-                  </a:lnTo>
-                  <a:lnTo>
-                    <a:pt x="1432450" y="2095473"/>
-                  </a:lnTo>
-                  <a:lnTo>
-                    <a:pt x="1504073" y="2131747"/>
-                  </a:lnTo>
-                  <a:lnTo>
-                    <a:pt x="1575695" y="2167176"/>
-                  </a:lnTo>
-                  <a:lnTo>
-                    <a:pt x="1647318" y="2201779"/>
-                  </a:lnTo>
-                  <a:lnTo>
-                    <a:pt x="1718940" y="2235577"/>
-                  </a:lnTo>
-                  <a:lnTo>
-                    <a:pt x="1790563" y="2268587"/>
-                  </a:lnTo>
-                  <a:lnTo>
-                    <a:pt x="1862185" y="2300828"/>
-                  </a:lnTo>
-                  <a:lnTo>
-                    <a:pt x="1933808" y="2332318"/>
-                  </a:lnTo>
-                  <a:lnTo>
-                    <a:pt x="2005430" y="2363075"/>
-                  </a:lnTo>
-                  <a:lnTo>
-                    <a:pt x="2077053" y="2393115"/>
-                  </a:lnTo>
-                  <a:lnTo>
-                    <a:pt x="2148675" y="2422456"/>
-                  </a:lnTo>
-                  <a:lnTo>
-                    <a:pt x="2220298" y="2451112"/>
-                  </a:lnTo>
-                  <a:lnTo>
-                    <a:pt x="2291920" y="2479102"/>
-                  </a:lnTo>
-                  <a:lnTo>
-                    <a:pt x="2363543" y="2506439"/>
-                  </a:lnTo>
-                  <a:lnTo>
-                    <a:pt x="2435165" y="2533140"/>
-                  </a:lnTo>
-                  <a:lnTo>
-                    <a:pt x="2506788" y="2559218"/>
-                  </a:lnTo>
-                  <a:lnTo>
-                    <a:pt x="2578410" y="2584689"/>
-                  </a:lnTo>
-                  <a:lnTo>
-                    <a:pt x="2650033" y="2609567"/>
-                  </a:lnTo>
-                  <a:lnTo>
-                    <a:pt x="2721655" y="2633865"/>
-                  </a:lnTo>
-                  <a:lnTo>
-                    <a:pt x="2793278" y="2657597"/>
-                  </a:lnTo>
-                  <a:lnTo>
-                    <a:pt x="2864901" y="2680777"/>
-                  </a:lnTo>
-                  <a:lnTo>
-                    <a:pt x="2936523" y="2703416"/>
-                  </a:lnTo>
-                  <a:lnTo>
-                    <a:pt x="3008146" y="2725528"/>
-                  </a:lnTo>
-                  <a:lnTo>
-                    <a:pt x="3079768" y="2747125"/>
-                  </a:lnTo>
-                  <a:lnTo>
-                    <a:pt x="3151391" y="2768219"/>
-                  </a:lnTo>
-                  <a:lnTo>
-                    <a:pt x="3223013" y="2774662"/>
-                  </a:lnTo>
-                  <a:lnTo>
-                    <a:pt x="3294636" y="2745061"/>
-                  </a:lnTo>
-                  <a:lnTo>
-                    <a:pt x="3366258" y="2714462"/>
-                  </a:lnTo>
-                  <a:lnTo>
-                    <a:pt x="3437881" y="2682831"/>
-                  </a:lnTo>
-                  <a:lnTo>
-                    <a:pt x="3509503" y="2650134"/>
-                  </a:lnTo>
-                  <a:lnTo>
-                    <a:pt x="3581126" y="2616335"/>
-                  </a:lnTo>
-                  <a:lnTo>
-                    <a:pt x="3652748" y="2581396"/>
-                  </a:lnTo>
-                  <a:lnTo>
-                    <a:pt x="3724371" y="2545279"/>
-                  </a:lnTo>
-                  <a:lnTo>
-                    <a:pt x="3795993" y="2507944"/>
-                  </a:lnTo>
-                  <a:lnTo>
-                    <a:pt x="3867616" y="2469351"/>
-                  </a:lnTo>
-                  <a:lnTo>
-                    <a:pt x="3939238" y="2429456"/>
-                  </a:lnTo>
-                  <a:lnTo>
-                    <a:pt x="4010861" y="2388217"/>
-                  </a:lnTo>
-                  <a:lnTo>
-                    <a:pt x="4082483" y="2345587"/>
-                  </a:lnTo>
-                  <a:lnTo>
-                    <a:pt x="4154106" y="2301520"/>
-                  </a:lnTo>
-                  <a:lnTo>
-                    <a:pt x="4225729" y="2255967"/>
-                  </a:lnTo>
-                  <a:lnTo>
-                    <a:pt x="4297351" y="2208878"/>
-                  </a:lnTo>
-                  <a:lnTo>
-                    <a:pt x="4368974" y="2160202"/>
-                  </a:lnTo>
-                  <a:lnTo>
-                    <a:pt x="4440596" y="2109884"/>
-                  </a:lnTo>
-                  <a:lnTo>
-                    <a:pt x="4512219" y="2057870"/>
-                  </a:lnTo>
-                  <a:lnTo>
-                    <a:pt x="4583841" y="2004103"/>
-                  </a:lnTo>
-                  <a:lnTo>
-                    <a:pt x="4655464" y="1948522"/>
-                  </a:lnTo>
-                  <a:lnTo>
-                    <a:pt x="4727086" y="1891068"/>
-                  </a:lnTo>
-                  <a:lnTo>
-                    <a:pt x="4798709" y="1831677"/>
-                  </a:lnTo>
-                  <a:lnTo>
-                    <a:pt x="4870331" y="1770283"/>
-                  </a:lnTo>
-                  <a:lnTo>
-                    <a:pt x="4941954" y="1706820"/>
-                  </a:lnTo>
-                  <a:lnTo>
-                    <a:pt x="5013576" y="1641216"/>
-                  </a:lnTo>
-                  <a:lnTo>
-                    <a:pt x="5085199" y="1573401"/>
-                  </a:lnTo>
-                  <a:lnTo>
-                    <a:pt x="5156821" y="1503300"/>
-                  </a:lnTo>
-                  <a:lnTo>
-                    <a:pt x="5228444" y="1430835"/>
-                  </a:lnTo>
-                  <a:lnTo>
-                    <a:pt x="5300066" y="1355927"/>
-                  </a:lnTo>
-                  <a:lnTo>
-                    <a:pt x="5371689" y="1278494"/>
-                  </a:lnTo>
-                  <a:lnTo>
-                    <a:pt x="5443311" y="1198450"/>
-                  </a:lnTo>
-                  <a:lnTo>
-                    <a:pt x="5514934" y="1115707"/>
-                  </a:lnTo>
-                  <a:lnTo>
-                    <a:pt x="5586557" y="1030174"/>
-                  </a:lnTo>
-                  <a:lnTo>
-                    <a:pt x="5658179" y="941758"/>
-                  </a:lnTo>
-                  <a:lnTo>
-                    <a:pt x="5729802" y="850361"/>
-                  </a:lnTo>
-                  <a:lnTo>
-                    <a:pt x="5801424" y="755882"/>
-                  </a:lnTo>
-                  <a:lnTo>
-                    <a:pt x="5873047" y="658219"/>
-                  </a:lnTo>
-                  <a:lnTo>
-                    <a:pt x="5944669" y="557262"/>
-                  </a:lnTo>
-                  <a:lnTo>
-                    <a:pt x="6016292" y="452902"/>
-                  </a:lnTo>
-                  <a:lnTo>
-                    <a:pt x="6087914" y="345023"/>
-                  </a:lnTo>
-                  <a:lnTo>
-                    <a:pt x="6159537" y="233507"/>
-                  </a:lnTo>
-                  <a:lnTo>
-                    <a:pt x="6231159" y="118231"/>
-                  </a:lnTo>
-                  <a:lnTo>
-                    <a:pt x="6302222" y="0"/>
+                    <a:pt x="71622" y="1145423"/>
+                  </a:lnTo>
+                  <a:lnTo>
+                    <a:pt x="143245" y="1206199"/>
+                  </a:lnTo>
+                  <a:lnTo>
+                    <a:pt x="214867" y="1265501"/>
+                  </a:lnTo>
+                  <a:lnTo>
+                    <a:pt x="286490" y="1323366"/>
+                  </a:lnTo>
+                  <a:lnTo>
+                    <a:pt x="358112" y="1379828"/>
+                  </a:lnTo>
+                  <a:lnTo>
+                    <a:pt x="429735" y="1434922"/>
+                  </a:lnTo>
+                  <a:lnTo>
+                    <a:pt x="501357" y="1488680"/>
+                  </a:lnTo>
+                  <a:lnTo>
+                    <a:pt x="572980" y="1541135"/>
+                  </a:lnTo>
+                  <a:lnTo>
+                    <a:pt x="644602" y="1592318"/>
+                  </a:lnTo>
+                  <a:lnTo>
+                    <a:pt x="716225" y="1642261"/>
+                  </a:lnTo>
+                  <a:lnTo>
+                    <a:pt x="787847" y="1690993"/>
+                  </a:lnTo>
+                  <a:lnTo>
+                    <a:pt x="859470" y="1738544"/>
+                  </a:lnTo>
+                  <a:lnTo>
+                    <a:pt x="931092" y="1784942"/>
+                  </a:lnTo>
+                  <a:lnTo>
+                    <a:pt x="1002715" y="1830215"/>
+                  </a:lnTo>
+                  <a:lnTo>
+                    <a:pt x="1074337" y="1874391"/>
+                  </a:lnTo>
+                  <a:lnTo>
+                    <a:pt x="1145960" y="1917497"/>
+                  </a:lnTo>
+                  <a:lnTo>
+                    <a:pt x="1217582" y="1959557"/>
+                  </a:lnTo>
+                  <a:lnTo>
+                    <a:pt x="1289205" y="2000598"/>
+                  </a:lnTo>
+                  <a:lnTo>
+                    <a:pt x="1360827" y="2040644"/>
+                  </a:lnTo>
+                  <a:lnTo>
+                    <a:pt x="1432450" y="2079719"/>
+                  </a:lnTo>
+                  <a:lnTo>
+                    <a:pt x="1504073" y="2117847"/>
+                  </a:lnTo>
+                  <a:lnTo>
+                    <a:pt x="1575695" y="2155051"/>
+                  </a:lnTo>
+                  <a:lnTo>
+                    <a:pt x="1647318" y="2191353"/>
+                  </a:lnTo>
+                  <a:lnTo>
+                    <a:pt x="1718940" y="2226775"/>
+                  </a:lnTo>
+                  <a:lnTo>
+                    <a:pt x="1790563" y="2261338"/>
+                  </a:lnTo>
+                  <a:lnTo>
+                    <a:pt x="1862185" y="2295064"/>
+                  </a:lnTo>
+                  <a:lnTo>
+                    <a:pt x="1933808" y="2327972"/>
+                  </a:lnTo>
+                  <a:lnTo>
+                    <a:pt x="2005430" y="2360082"/>
+                  </a:lnTo>
+                  <a:lnTo>
+                    <a:pt x="2077053" y="2391414"/>
+                  </a:lnTo>
+                  <a:lnTo>
+                    <a:pt x="2148675" y="2421987"/>
+                  </a:lnTo>
+                  <a:lnTo>
+                    <a:pt x="2220298" y="2451818"/>
+                  </a:lnTo>
+                  <a:lnTo>
+                    <a:pt x="2291920" y="2480926"/>
+                  </a:lnTo>
+                  <a:lnTo>
+                    <a:pt x="2363543" y="2509329"/>
+                  </a:lnTo>
+                  <a:lnTo>
+                    <a:pt x="2435165" y="2537043"/>
+                  </a:lnTo>
+                  <a:lnTo>
+                    <a:pt x="2506788" y="2564085"/>
+                  </a:lnTo>
+                  <a:lnTo>
+                    <a:pt x="2578410" y="2590472"/>
+                  </a:lnTo>
+                  <a:lnTo>
+                    <a:pt x="2650033" y="2616220"/>
+                  </a:lnTo>
+                  <a:lnTo>
+                    <a:pt x="2721655" y="2641343"/>
+                  </a:lnTo>
+                  <a:lnTo>
+                    <a:pt x="2793278" y="2665857"/>
+                  </a:lnTo>
+                  <a:lnTo>
+                    <a:pt x="2864901" y="2689777"/>
+                  </a:lnTo>
+                  <a:lnTo>
+                    <a:pt x="2936523" y="2713117"/>
+                  </a:lnTo>
+                  <a:lnTo>
+                    <a:pt x="3008146" y="2735891"/>
+                  </a:lnTo>
+                  <a:lnTo>
+                    <a:pt x="3079768" y="2758114"/>
+                  </a:lnTo>
+                  <a:lnTo>
+                    <a:pt x="3151391" y="2779797"/>
+                  </a:lnTo>
+                  <a:lnTo>
+                    <a:pt x="3223013" y="2758281"/>
+                  </a:lnTo>
+                  <a:lnTo>
+                    <a:pt x="3294636" y="2728405"/>
+                  </a:lnTo>
+                  <a:lnTo>
+                    <a:pt x="3366258" y="2697531"/>
+                  </a:lnTo>
+                  <a:lnTo>
+                    <a:pt x="3437881" y="2665625"/>
+                  </a:lnTo>
+                  <a:lnTo>
+                    <a:pt x="3509503" y="2632653"/>
+                  </a:lnTo>
+                  <a:lnTo>
+                    <a:pt x="3581126" y="2598580"/>
+                  </a:lnTo>
+                  <a:lnTo>
+                    <a:pt x="3652748" y="2563369"/>
+                  </a:lnTo>
+                  <a:lnTo>
+                    <a:pt x="3724371" y="2526982"/>
+                  </a:lnTo>
+                  <a:lnTo>
+                    <a:pt x="3795993" y="2489379"/>
+                  </a:lnTo>
+                  <a:lnTo>
+                    <a:pt x="3867616" y="2450520"/>
+                  </a:lnTo>
+                  <a:lnTo>
+                    <a:pt x="3939238" y="2410363"/>
+                  </a:lnTo>
+                  <a:lnTo>
+                    <a:pt x="4010861" y="2368864"/>
+                  </a:lnTo>
+                  <a:lnTo>
+                    <a:pt x="4082483" y="2325979"/>
+                  </a:lnTo>
+                  <a:lnTo>
+                    <a:pt x="4154106" y="2281662"/>
+                  </a:lnTo>
+                  <a:lnTo>
+                    <a:pt x="4225729" y="2235864"/>
+                  </a:lnTo>
+                  <a:lnTo>
+                    <a:pt x="4297351" y="2188536"/>
+                  </a:lnTo>
+                  <a:lnTo>
+                    <a:pt x="4368974" y="2139627"/>
+                  </a:lnTo>
+                  <a:lnTo>
+                    <a:pt x="4440596" y="2089085"/>
+                  </a:lnTo>
+                  <a:lnTo>
+                    <a:pt x="4512219" y="2036854"/>
+                  </a:lnTo>
+                  <a:lnTo>
+                    <a:pt x="4583841" y="1982878"/>
+                  </a:lnTo>
+                  <a:lnTo>
+                    <a:pt x="4655464" y="1927099"/>
+                  </a:lnTo>
+                  <a:lnTo>
+                    <a:pt x="4727086" y="1869457"/>
+                  </a:lnTo>
+                  <a:lnTo>
+                    <a:pt x="4798709" y="1809889"/>
+                  </a:lnTo>
+                  <a:lnTo>
+                    <a:pt x="4870331" y="1748332"/>
+                  </a:lnTo>
+                  <a:lnTo>
+                    <a:pt x="4941954" y="1684718"/>
+                  </a:lnTo>
+                  <a:lnTo>
+                    <a:pt x="5013576" y="1618979"/>
+                  </a:lnTo>
+                  <a:lnTo>
+                    <a:pt x="5085199" y="1551044"/>
+                  </a:lnTo>
+                  <a:lnTo>
+                    <a:pt x="5156821" y="1480840"/>
+                  </a:lnTo>
+                  <a:lnTo>
+                    <a:pt x="5228444" y="1408290"/>
+                  </a:lnTo>
+                  <a:lnTo>
+                    <a:pt x="5300066" y="1333317"/>
+                  </a:lnTo>
+                  <a:lnTo>
+                    <a:pt x="5371689" y="1255840"/>
+                  </a:lnTo>
+                  <a:lnTo>
+                    <a:pt x="5443311" y="1175774"/>
+                  </a:lnTo>
+                  <a:lnTo>
+                    <a:pt x="5514934" y="1093034"/>
+                  </a:lnTo>
+                  <a:lnTo>
+                    <a:pt x="5586557" y="1007529"/>
+                  </a:lnTo>
+                  <a:lnTo>
+                    <a:pt x="5658179" y="919169"/>
+                  </a:lnTo>
+                  <a:lnTo>
+                    <a:pt x="5729802" y="827857"/>
+                  </a:lnTo>
+                  <a:lnTo>
+                    <a:pt x="5801424" y="733494"/>
+                  </a:lnTo>
+                  <a:lnTo>
+                    <a:pt x="5873047" y="635979"/>
+                  </a:lnTo>
+                  <a:lnTo>
+                    <a:pt x="5944669" y="535207"/>
+                  </a:lnTo>
+                  <a:lnTo>
+                    <a:pt x="6016292" y="431068"/>
+                  </a:lnTo>
+                  <a:lnTo>
+                    <a:pt x="6087914" y="323451"/>
+                  </a:lnTo>
+                  <a:lnTo>
+                    <a:pt x="6159537" y="212239"/>
+                  </a:lnTo>
+                  <a:lnTo>
+                    <a:pt x="6231159" y="97312"/>
+                  </a:lnTo>
+                  <a:lnTo>
+                    <a:pt x="6289844" y="0"/>
                   </a:lnTo>
                 </a:path>
               </a:pathLst>
@@ -3852,312 +3852,312 @@
           </p:nvSpPr>
           <p:spPr>
             <a:xfrm>
-              <a:off x="1172049" y="4685385"/>
-              <a:ext cx="7090630" cy="666374"/>
+              <a:off x="1172049" y="4683755"/>
+              <a:ext cx="7090630" cy="661590"/>
             </a:xfrm>
             <a:custGeom>
               <a:avLst/>
               <a:pathLst>
-                <a:path w="7090630" h="666374">
+                <a:path w="7090630" h="661590">
                   <a:moveTo>
-                    <a:pt x="7090630" y="621911"/>
+                    <a:pt x="7090630" y="639092"/>
                   </a:moveTo>
                   <a:lnTo>
-                    <a:pt x="7019007" y="616141"/>
-                  </a:lnTo>
-                  <a:lnTo>
-                    <a:pt x="6947385" y="610234"/>
-                  </a:lnTo>
-                  <a:lnTo>
-                    <a:pt x="6875762" y="604186"/>
-                  </a:lnTo>
-                  <a:lnTo>
-                    <a:pt x="6804139" y="597994"/>
-                  </a:lnTo>
-                  <a:lnTo>
-                    <a:pt x="6732517" y="591654"/>
-                  </a:lnTo>
-                  <a:lnTo>
-                    <a:pt x="6660894" y="585162"/>
-                  </a:lnTo>
-                  <a:lnTo>
-                    <a:pt x="6589272" y="578516"/>
-                  </a:lnTo>
-                  <a:lnTo>
-                    <a:pt x="6517649" y="571712"/>
-                  </a:lnTo>
-                  <a:lnTo>
-                    <a:pt x="6446027" y="564745"/>
-                  </a:lnTo>
-                  <a:lnTo>
-                    <a:pt x="6374404" y="557612"/>
-                  </a:lnTo>
-                  <a:lnTo>
-                    <a:pt x="6302782" y="550308"/>
-                  </a:lnTo>
-                  <a:lnTo>
-                    <a:pt x="6231159" y="542831"/>
-                  </a:lnTo>
-                  <a:lnTo>
-                    <a:pt x="6159537" y="535175"/>
-                  </a:lnTo>
-                  <a:lnTo>
-                    <a:pt x="6087914" y="527337"/>
-                  </a:lnTo>
-                  <a:lnTo>
-                    <a:pt x="6016292" y="519312"/>
-                  </a:lnTo>
-                  <a:lnTo>
-                    <a:pt x="5944669" y="511095"/>
-                  </a:lnTo>
-                  <a:lnTo>
-                    <a:pt x="5873047" y="502682"/>
-                  </a:lnTo>
-                  <a:lnTo>
-                    <a:pt x="5801424" y="494069"/>
-                  </a:lnTo>
-                  <a:lnTo>
-                    <a:pt x="5729802" y="485250"/>
-                  </a:lnTo>
-                  <a:lnTo>
-                    <a:pt x="5658179" y="476221"/>
-                  </a:lnTo>
-                  <a:lnTo>
-                    <a:pt x="5586557" y="466977"/>
-                  </a:lnTo>
-                  <a:lnTo>
-                    <a:pt x="5514934" y="457512"/>
-                  </a:lnTo>
-                  <a:lnTo>
-                    <a:pt x="5443311" y="447821"/>
-                  </a:lnTo>
-                  <a:lnTo>
-                    <a:pt x="5371689" y="437900"/>
-                  </a:lnTo>
-                  <a:lnTo>
-                    <a:pt x="5300066" y="427741"/>
-                  </a:lnTo>
-                  <a:lnTo>
-                    <a:pt x="5228444" y="417341"/>
-                  </a:lnTo>
-                  <a:lnTo>
-                    <a:pt x="5156821" y="406692"/>
-                  </a:lnTo>
-                  <a:lnTo>
-                    <a:pt x="5085199" y="395789"/>
-                  </a:lnTo>
-                  <a:lnTo>
-                    <a:pt x="5013576" y="384626"/>
-                  </a:lnTo>
-                  <a:lnTo>
-                    <a:pt x="4941954" y="373197"/>
-                  </a:lnTo>
-                  <a:lnTo>
-                    <a:pt x="4870331" y="361496"/>
-                  </a:lnTo>
-                  <a:lnTo>
-                    <a:pt x="4798709" y="349515"/>
-                  </a:lnTo>
-                  <a:lnTo>
-                    <a:pt x="4727086" y="337249"/>
-                  </a:lnTo>
-                  <a:lnTo>
-                    <a:pt x="4655464" y="324690"/>
-                  </a:lnTo>
-                  <a:lnTo>
-                    <a:pt x="4583841" y="311831"/>
-                  </a:lnTo>
-                  <a:lnTo>
-                    <a:pt x="4512219" y="298666"/>
-                  </a:lnTo>
-                  <a:lnTo>
-                    <a:pt x="4440596" y="285187"/>
-                  </a:lnTo>
-                  <a:lnTo>
-                    <a:pt x="4368974" y="271387"/>
-                  </a:lnTo>
-                  <a:lnTo>
-                    <a:pt x="4297351" y="257257"/>
-                  </a:lnTo>
-                  <a:lnTo>
-                    <a:pt x="4225729" y="242790"/>
-                  </a:lnTo>
-                  <a:lnTo>
-                    <a:pt x="4154106" y="227978"/>
-                  </a:lnTo>
-                  <a:lnTo>
-                    <a:pt x="4082483" y="212813"/>
-                  </a:lnTo>
-                  <a:lnTo>
-                    <a:pt x="4010861" y="197286"/>
-                  </a:lnTo>
-                  <a:lnTo>
-                    <a:pt x="3939238" y="181389"/>
-                  </a:lnTo>
-                  <a:lnTo>
-                    <a:pt x="3867616" y="165113"/>
-                  </a:lnTo>
-                  <a:lnTo>
-                    <a:pt x="3795993" y="148449"/>
-                  </a:lnTo>
-                  <a:lnTo>
-                    <a:pt x="3724371" y="131387"/>
-                  </a:lnTo>
-                  <a:lnTo>
-                    <a:pt x="3652748" y="113918"/>
-                  </a:lnTo>
-                  <a:lnTo>
-                    <a:pt x="3581126" y="96032"/>
-                  </a:lnTo>
-                  <a:lnTo>
-                    <a:pt x="3509503" y="77720"/>
-                  </a:lnTo>
-                  <a:lnTo>
-                    <a:pt x="3437881" y="58972"/>
-                  </a:lnTo>
-                  <a:lnTo>
-                    <a:pt x="3366258" y="39776"/>
-                  </a:lnTo>
-                  <a:lnTo>
-                    <a:pt x="3294636" y="20122"/>
-                  </a:lnTo>
-                  <a:lnTo>
-                    <a:pt x="3223013" y="0"/>
-                  </a:lnTo>
-                  <a:lnTo>
-                    <a:pt x="3151391" y="14476"/>
-                  </a:lnTo>
-                  <a:lnTo>
-                    <a:pt x="3079768" y="42178"/>
-                  </a:lnTo>
-                  <a:lnTo>
-                    <a:pt x="3008146" y="68976"/>
-                  </a:lnTo>
-                  <a:lnTo>
-                    <a:pt x="2936523" y="94900"/>
-                  </a:lnTo>
-                  <a:lnTo>
-                    <a:pt x="2864901" y="119978"/>
-                  </a:lnTo>
-                  <a:lnTo>
-                    <a:pt x="2793278" y="144239"/>
-                  </a:lnTo>
-                  <a:lnTo>
-                    <a:pt x="2721655" y="167708"/>
-                  </a:lnTo>
-                  <a:lnTo>
-                    <a:pt x="2650033" y="190412"/>
-                  </a:lnTo>
-                  <a:lnTo>
-                    <a:pt x="2578410" y="212376"/>
-                  </a:lnTo>
-                  <a:lnTo>
-                    <a:pt x="2506788" y="233623"/>
-                  </a:lnTo>
-                  <a:lnTo>
-                    <a:pt x="2435165" y="254177"/>
-                  </a:lnTo>
-                  <a:lnTo>
-                    <a:pt x="2363543" y="274061"/>
-                  </a:lnTo>
-                  <a:lnTo>
-                    <a:pt x="2291920" y="293296"/>
-                  </a:lnTo>
-                  <a:lnTo>
-                    <a:pt x="2220298" y="311904"/>
-                  </a:lnTo>
-                  <a:lnTo>
-                    <a:pt x="2148675" y="329905"/>
-                  </a:lnTo>
-                  <a:lnTo>
-                    <a:pt x="2077053" y="347318"/>
-                  </a:lnTo>
-                  <a:lnTo>
-                    <a:pt x="2005430" y="364164"/>
-                  </a:lnTo>
-                  <a:lnTo>
-                    <a:pt x="1933808" y="380461"/>
-                  </a:lnTo>
-                  <a:lnTo>
-                    <a:pt x="1862185" y="396226"/>
-                  </a:lnTo>
-                  <a:lnTo>
-                    <a:pt x="1790563" y="411476"/>
-                  </a:lnTo>
-                  <a:lnTo>
-                    <a:pt x="1718940" y="426230"/>
-                  </a:lnTo>
-                  <a:lnTo>
-                    <a:pt x="1647318" y="440502"/>
-                  </a:lnTo>
-                  <a:lnTo>
-                    <a:pt x="1575695" y="454309"/>
-                  </a:lnTo>
-                  <a:lnTo>
-                    <a:pt x="1504073" y="467665"/>
-                  </a:lnTo>
-                  <a:lnTo>
-                    <a:pt x="1432450" y="480586"/>
-                  </a:lnTo>
-                  <a:lnTo>
-                    <a:pt x="1360827" y="493085"/>
-                  </a:lnTo>
-                  <a:lnTo>
-                    <a:pt x="1289205" y="505177"/>
-                  </a:lnTo>
-                  <a:lnTo>
-                    <a:pt x="1217582" y="516874"/>
-                  </a:lnTo>
-                  <a:lnTo>
-                    <a:pt x="1145960" y="528190"/>
-                  </a:lnTo>
-                  <a:lnTo>
-                    <a:pt x="1074337" y="539137"/>
-                  </a:lnTo>
-                  <a:lnTo>
-                    <a:pt x="1002715" y="549726"/>
-                  </a:lnTo>
-                  <a:lnTo>
-                    <a:pt x="931092" y="559971"/>
-                  </a:lnTo>
-                  <a:lnTo>
-                    <a:pt x="859470" y="569881"/>
-                  </a:lnTo>
-                  <a:lnTo>
-                    <a:pt x="787847" y="579468"/>
-                  </a:lnTo>
-                  <a:lnTo>
-                    <a:pt x="716225" y="588742"/>
-                  </a:lnTo>
-                  <a:lnTo>
-                    <a:pt x="644602" y="597714"/>
-                  </a:lnTo>
-                  <a:lnTo>
-                    <a:pt x="572980" y="606393"/>
-                  </a:lnTo>
-                  <a:lnTo>
-                    <a:pt x="501357" y="614789"/>
-                  </a:lnTo>
-                  <a:lnTo>
-                    <a:pt x="429735" y="622911"/>
-                  </a:lnTo>
-                  <a:lnTo>
-                    <a:pt x="358112" y="630769"/>
-                  </a:lnTo>
-                  <a:lnTo>
-                    <a:pt x="286490" y="638370"/>
-                  </a:lnTo>
-                  <a:lnTo>
-                    <a:pt x="214867" y="645723"/>
-                  </a:lnTo>
-                  <a:lnTo>
-                    <a:pt x="143245" y="652836"/>
-                  </a:lnTo>
-                  <a:lnTo>
-                    <a:pt x="71622" y="659718"/>
-                  </a:lnTo>
-                  <a:lnTo>
-                    <a:pt x="0" y="666374"/>
+                    <a:pt x="7019007" y="633469"/>
+                  </a:lnTo>
+                  <a:lnTo>
+                    <a:pt x="6947385" y="627706"/>
+                  </a:lnTo>
+                  <a:lnTo>
+                    <a:pt x="6875762" y="621799"/>
+                  </a:lnTo>
+                  <a:lnTo>
+                    <a:pt x="6804139" y="615747"/>
+                  </a:lnTo>
+                  <a:lnTo>
+                    <a:pt x="6732517" y="609543"/>
+                  </a:lnTo>
+                  <a:lnTo>
+                    <a:pt x="6660894" y="603186"/>
+                  </a:lnTo>
+                  <a:lnTo>
+                    <a:pt x="6589272" y="596671"/>
+                  </a:lnTo>
+                  <a:lnTo>
+                    <a:pt x="6517649" y="589993"/>
+                  </a:lnTo>
+                  <a:lnTo>
+                    <a:pt x="6446027" y="583150"/>
+                  </a:lnTo>
+                  <a:lnTo>
+                    <a:pt x="6374404" y="576137"/>
+                  </a:lnTo>
+                  <a:lnTo>
+                    <a:pt x="6302782" y="568950"/>
+                  </a:lnTo>
+                  <a:lnTo>
+                    <a:pt x="6231159" y="561584"/>
+                  </a:lnTo>
+                  <a:lnTo>
+                    <a:pt x="6159537" y="554036"/>
+                  </a:lnTo>
+                  <a:lnTo>
+                    <a:pt x="6087914" y="546299"/>
+                  </a:lnTo>
+                  <a:lnTo>
+                    <a:pt x="6016292" y="538371"/>
+                  </a:lnTo>
+                  <a:lnTo>
+                    <a:pt x="5944669" y="530245"/>
+                  </a:lnTo>
+                  <a:lnTo>
+                    <a:pt x="5873047" y="521918"/>
+                  </a:lnTo>
+                  <a:lnTo>
+                    <a:pt x="5801424" y="513384"/>
+                  </a:lnTo>
+                  <a:lnTo>
+                    <a:pt x="5729802" y="504638"/>
+                  </a:lnTo>
+                  <a:lnTo>
+                    <a:pt x="5658179" y="495674"/>
+                  </a:lnTo>
+                  <a:lnTo>
+                    <a:pt x="5586557" y="486488"/>
+                  </a:lnTo>
+                  <a:lnTo>
+                    <a:pt x="5514934" y="477074"/>
+                  </a:lnTo>
+                  <a:lnTo>
+                    <a:pt x="5443311" y="467425"/>
+                  </a:lnTo>
+                  <a:lnTo>
+                    <a:pt x="5371689" y="457538"/>
+                  </a:lnTo>
+                  <a:lnTo>
+                    <a:pt x="5300066" y="447404"/>
+                  </a:lnTo>
+                  <a:lnTo>
+                    <a:pt x="5228444" y="437019"/>
+                  </a:lnTo>
+                  <a:lnTo>
+                    <a:pt x="5156821" y="426375"/>
+                  </a:lnTo>
+                  <a:lnTo>
+                    <a:pt x="5085199" y="415468"/>
+                  </a:lnTo>
+                  <a:lnTo>
+                    <a:pt x="5013576" y="404289"/>
+                  </a:lnTo>
+                  <a:lnTo>
+                    <a:pt x="4941954" y="392833"/>
+                  </a:lnTo>
+                  <a:lnTo>
+                    <a:pt x="4870331" y="381092"/>
+                  </a:lnTo>
+                  <a:lnTo>
+                    <a:pt x="4798709" y="369059"/>
+                  </a:lnTo>
+                  <a:lnTo>
+                    <a:pt x="4727086" y="356727"/>
+                  </a:lnTo>
+                  <a:lnTo>
+                    <a:pt x="4655464" y="344090"/>
+                  </a:lnTo>
+                  <a:lnTo>
+                    <a:pt x="4583841" y="331138"/>
+                  </a:lnTo>
+                  <a:lnTo>
+                    <a:pt x="4512219" y="317864"/>
+                  </a:lnTo>
+                  <a:lnTo>
+                    <a:pt x="4440596" y="304261"/>
+                  </a:lnTo>
+                  <a:lnTo>
+                    <a:pt x="4368974" y="290319"/>
+                  </a:lnTo>
+                  <a:lnTo>
+                    <a:pt x="4297351" y="276032"/>
+                  </a:lnTo>
+                  <a:lnTo>
+                    <a:pt x="4225729" y="261389"/>
+                  </a:lnTo>
+                  <a:lnTo>
+                    <a:pt x="4154106" y="246383"/>
+                  </a:lnTo>
+                  <a:lnTo>
+                    <a:pt x="4082483" y="231004"/>
+                  </a:lnTo>
+                  <a:lnTo>
+                    <a:pt x="4010861" y="215242"/>
+                  </a:lnTo>
+                  <a:lnTo>
+                    <a:pt x="3939238" y="199090"/>
+                  </a:lnTo>
+                  <a:lnTo>
+                    <a:pt x="3867616" y="182536"/>
+                  </a:lnTo>
+                  <a:lnTo>
+                    <a:pt x="3795993" y="165570"/>
+                  </a:lnTo>
+                  <a:lnTo>
+                    <a:pt x="3724371" y="148184"/>
+                  </a:lnTo>
+                  <a:lnTo>
+                    <a:pt x="3652748" y="130365"/>
+                  </a:lnTo>
+                  <a:lnTo>
+                    <a:pt x="3581126" y="112104"/>
+                  </a:lnTo>
+                  <a:lnTo>
+                    <a:pt x="3509503" y="93389"/>
+                  </a:lnTo>
+                  <a:lnTo>
+                    <a:pt x="3437881" y="74209"/>
+                  </a:lnTo>
+                  <a:lnTo>
+                    <a:pt x="3366258" y="54553"/>
+                  </a:lnTo>
+                  <a:lnTo>
+                    <a:pt x="3294636" y="34408"/>
+                  </a:lnTo>
+                  <a:lnTo>
+                    <a:pt x="3223013" y="13763"/>
+                  </a:lnTo>
+                  <a:lnTo>
+                    <a:pt x="3151391" y="0"/>
+                  </a:lnTo>
+                  <a:lnTo>
+                    <a:pt x="3079768" y="27976"/>
+                  </a:lnTo>
+                  <a:lnTo>
+                    <a:pt x="3008146" y="55047"/>
+                  </a:lnTo>
+                  <a:lnTo>
+                    <a:pt x="2936523" y="81244"/>
+                  </a:lnTo>
+                  <a:lnTo>
+                    <a:pt x="2864901" y="106594"/>
+                  </a:lnTo>
+                  <a:lnTo>
+                    <a:pt x="2793278" y="131124"/>
+                  </a:lnTo>
+                  <a:lnTo>
+                    <a:pt x="2721655" y="154861"/>
+                  </a:lnTo>
+                  <a:lnTo>
+                    <a:pt x="2650033" y="177831"/>
+                  </a:lnTo>
+                  <a:lnTo>
+                    <a:pt x="2578410" y="200059"/>
+                  </a:lnTo>
+                  <a:lnTo>
+                    <a:pt x="2506788" y="221568"/>
+                  </a:lnTo>
+                  <a:lnTo>
+                    <a:pt x="2435165" y="242382"/>
+                  </a:lnTo>
+                  <a:lnTo>
+                    <a:pt x="2363543" y="262523"/>
+                  </a:lnTo>
+                  <a:lnTo>
+                    <a:pt x="2291920" y="282012"/>
+                  </a:lnTo>
+                  <a:lnTo>
+                    <a:pt x="2220298" y="300872"/>
+                  </a:lnTo>
+                  <a:lnTo>
+                    <a:pt x="2148675" y="319123"/>
+                  </a:lnTo>
+                  <a:lnTo>
+                    <a:pt x="2077053" y="336783"/>
+                  </a:lnTo>
+                  <a:lnTo>
+                    <a:pt x="2005430" y="353872"/>
+                  </a:lnTo>
+                  <a:lnTo>
+                    <a:pt x="1933808" y="370409"/>
+                  </a:lnTo>
+                  <a:lnTo>
+                    <a:pt x="1862185" y="386412"/>
+                  </a:lnTo>
+                  <a:lnTo>
+                    <a:pt x="1790563" y="401897"/>
+                  </a:lnTo>
+                  <a:lnTo>
+                    <a:pt x="1718940" y="416881"/>
+                  </a:lnTo>
+                  <a:lnTo>
+                    <a:pt x="1647318" y="431381"/>
+                  </a:lnTo>
+                  <a:lnTo>
+                    <a:pt x="1575695" y="445413"/>
+                  </a:lnTo>
+                  <a:lnTo>
+                    <a:pt x="1504073" y="458991"/>
+                  </a:lnTo>
+                  <a:lnTo>
+                    <a:pt x="1432450" y="472130"/>
+                  </a:lnTo>
+                  <a:lnTo>
+                    <a:pt x="1360827" y="484844"/>
+                  </a:lnTo>
+                  <a:lnTo>
+                    <a:pt x="1289205" y="497147"/>
+                  </a:lnTo>
+                  <a:lnTo>
+                    <a:pt x="1217582" y="509053"/>
+                  </a:lnTo>
+                  <a:lnTo>
+                    <a:pt x="1145960" y="520573"/>
+                  </a:lnTo>
+                  <a:lnTo>
+                    <a:pt x="1074337" y="531722"/>
+                  </a:lnTo>
+                  <a:lnTo>
+                    <a:pt x="1002715" y="542510"/>
+                  </a:lnTo>
+                  <a:lnTo>
+                    <a:pt x="931092" y="552949"/>
+                  </a:lnTo>
+                  <a:lnTo>
+                    <a:pt x="859470" y="563051"/>
+                  </a:lnTo>
+                  <a:lnTo>
+                    <a:pt x="787847" y="572826"/>
+                  </a:lnTo>
+                  <a:lnTo>
+                    <a:pt x="716225" y="582285"/>
+                  </a:lnTo>
+                  <a:lnTo>
+                    <a:pt x="644602" y="591438"/>
+                  </a:lnTo>
+                  <a:lnTo>
+                    <a:pt x="572980" y="600296"/>
+                  </a:lnTo>
+                  <a:lnTo>
+                    <a:pt x="501357" y="608867"/>
+                  </a:lnTo>
+                  <a:lnTo>
+                    <a:pt x="429735" y="617161"/>
+                  </a:lnTo>
+                  <a:lnTo>
+                    <a:pt x="358112" y="625187"/>
+                  </a:lnTo>
+                  <a:lnTo>
+                    <a:pt x="286490" y="632954"/>
+                  </a:lnTo>
+                  <a:lnTo>
+                    <a:pt x="214867" y="640470"/>
+                  </a:lnTo>
+                  <a:lnTo>
+                    <a:pt x="143245" y="647742"/>
+                  </a:lnTo>
+                  <a:lnTo>
+                    <a:pt x="71622" y="654780"/>
+                  </a:lnTo>
+                  <a:lnTo>
+                    <a:pt x="0" y="661590"/>
                   </a:lnTo>
                 </a:path>
               </a:pathLst>
@@ -4177,309 +4177,309 @@
           </p:nvSpPr>
           <p:spPr>
             <a:xfrm>
-              <a:off x="1172049" y="4420995"/>
-              <a:ext cx="7090630" cy="426339"/>
+              <a:off x="1172049" y="4456603"/>
+              <a:ext cx="7090630" cy="368848"/>
             </a:xfrm>
             <a:custGeom>
               <a:avLst/>
               <a:pathLst>
-                <a:path w="7090630" h="426339">
+                <a:path w="7090630" h="368848">
                   <a:moveTo>
-                    <a:pt x="0" y="426339"/>
+                    <a:pt x="0" y="368848"/>
                   </a:moveTo>
                   <a:lnTo>
-                    <a:pt x="71622" y="422966"/>
-                  </a:lnTo>
-                  <a:lnTo>
-                    <a:pt x="143245" y="419576"/>
-                  </a:lnTo>
-                  <a:lnTo>
-                    <a:pt x="214867" y="416171"/>
-                  </a:lnTo>
-                  <a:lnTo>
-                    <a:pt x="286490" y="412749"/>
-                  </a:lnTo>
-                  <a:lnTo>
-                    <a:pt x="358112" y="409310"/>
-                  </a:lnTo>
-                  <a:lnTo>
-                    <a:pt x="429735" y="405856"/>
-                  </a:lnTo>
-                  <a:lnTo>
-                    <a:pt x="501357" y="402384"/>
-                  </a:lnTo>
-                  <a:lnTo>
-                    <a:pt x="572980" y="398896"/>
-                  </a:lnTo>
-                  <a:lnTo>
-                    <a:pt x="644602" y="395391"/>
-                  </a:lnTo>
-                  <a:lnTo>
-                    <a:pt x="716225" y="391869"/>
-                  </a:lnTo>
-                  <a:lnTo>
-                    <a:pt x="787847" y="388330"/>
-                  </a:lnTo>
-                  <a:lnTo>
-                    <a:pt x="859470" y="384775"/>
-                  </a:lnTo>
-                  <a:lnTo>
-                    <a:pt x="931092" y="381202"/>
-                  </a:lnTo>
-                  <a:lnTo>
-                    <a:pt x="1002715" y="377612"/>
-                  </a:lnTo>
-                  <a:lnTo>
-                    <a:pt x="1074337" y="374004"/>
-                  </a:lnTo>
-                  <a:lnTo>
-                    <a:pt x="1145960" y="370380"/>
-                  </a:lnTo>
-                  <a:lnTo>
-                    <a:pt x="1217582" y="366738"/>
-                  </a:lnTo>
-                  <a:lnTo>
-                    <a:pt x="1289205" y="363078"/>
-                  </a:lnTo>
-                  <a:lnTo>
-                    <a:pt x="1360827" y="359401"/>
-                  </a:lnTo>
-                  <a:lnTo>
-                    <a:pt x="1432450" y="355707"/>
-                  </a:lnTo>
-                  <a:lnTo>
-                    <a:pt x="1504073" y="351994"/>
-                  </a:lnTo>
-                  <a:lnTo>
-                    <a:pt x="1575695" y="348264"/>
-                  </a:lnTo>
-                  <a:lnTo>
-                    <a:pt x="1647318" y="344515"/>
-                  </a:lnTo>
-                  <a:lnTo>
-                    <a:pt x="1718940" y="340749"/>
-                  </a:lnTo>
-                  <a:lnTo>
-                    <a:pt x="1790563" y="336965"/>
-                  </a:lnTo>
-                  <a:lnTo>
-                    <a:pt x="1862185" y="333162"/>
-                  </a:lnTo>
-                  <a:lnTo>
-                    <a:pt x="1933808" y="329341"/>
-                  </a:lnTo>
-                  <a:lnTo>
-                    <a:pt x="2005430" y="325502"/>
-                  </a:lnTo>
-                  <a:lnTo>
-                    <a:pt x="2077053" y="321644"/>
-                  </a:lnTo>
-                  <a:lnTo>
-                    <a:pt x="2148675" y="317768"/>
-                  </a:lnTo>
-                  <a:lnTo>
-                    <a:pt x="2220298" y="313873"/>
-                  </a:lnTo>
-                  <a:lnTo>
-                    <a:pt x="2291920" y="309960"/>
-                  </a:lnTo>
-                  <a:lnTo>
-                    <a:pt x="2363543" y="306027"/>
-                  </a:lnTo>
-                  <a:lnTo>
-                    <a:pt x="2435165" y="302076"/>
-                  </a:lnTo>
-                  <a:lnTo>
-                    <a:pt x="2506788" y="298106"/>
-                  </a:lnTo>
-                  <a:lnTo>
-                    <a:pt x="2578410" y="294116"/>
-                  </a:lnTo>
-                  <a:lnTo>
-                    <a:pt x="2650033" y="290108"/>
-                  </a:lnTo>
-                  <a:lnTo>
-                    <a:pt x="2721655" y="286080"/>
-                  </a:lnTo>
-                  <a:lnTo>
-                    <a:pt x="2793278" y="282033"/>
-                  </a:lnTo>
-                  <a:lnTo>
-                    <a:pt x="2864901" y="277966"/>
-                  </a:lnTo>
-                  <a:lnTo>
-                    <a:pt x="2936523" y="273880"/>
-                  </a:lnTo>
-                  <a:lnTo>
-                    <a:pt x="3008146" y="269774"/>
-                  </a:lnTo>
-                  <a:lnTo>
-                    <a:pt x="3079768" y="265649"/>
-                  </a:lnTo>
-                  <a:lnTo>
-                    <a:pt x="3151391" y="261504"/>
-                  </a:lnTo>
-                  <a:lnTo>
-                    <a:pt x="3223013" y="257338"/>
-                  </a:lnTo>
-                  <a:lnTo>
-                    <a:pt x="3294636" y="253153"/>
-                  </a:lnTo>
-                  <a:lnTo>
-                    <a:pt x="3366258" y="248948"/>
-                  </a:lnTo>
-                  <a:lnTo>
-                    <a:pt x="3437881" y="244722"/>
-                  </a:lnTo>
-                  <a:lnTo>
-                    <a:pt x="3509503" y="240476"/>
-                  </a:lnTo>
-                  <a:lnTo>
-                    <a:pt x="3581126" y="236210"/>
-                  </a:lnTo>
-                  <a:lnTo>
-                    <a:pt x="3652748" y="231923"/>
-                  </a:lnTo>
-                  <a:lnTo>
-                    <a:pt x="3724371" y="227616"/>
-                  </a:lnTo>
-                  <a:lnTo>
-                    <a:pt x="3795993" y="223288"/>
-                  </a:lnTo>
-                  <a:lnTo>
-                    <a:pt x="3867616" y="218939"/>
-                  </a:lnTo>
-                  <a:lnTo>
-                    <a:pt x="3939238" y="214569"/>
-                  </a:lnTo>
-                  <a:lnTo>
-                    <a:pt x="4010861" y="210178"/>
-                  </a:lnTo>
-                  <a:lnTo>
-                    <a:pt x="4082483" y="205766"/>
-                  </a:lnTo>
-                  <a:lnTo>
-                    <a:pt x="4154106" y="201333"/>
-                  </a:lnTo>
-                  <a:lnTo>
-                    <a:pt x="4225729" y="196879"/>
-                  </a:lnTo>
-                  <a:lnTo>
-                    <a:pt x="4297351" y="192403"/>
-                  </a:lnTo>
-                  <a:lnTo>
-                    <a:pt x="4368974" y="187905"/>
-                  </a:lnTo>
-                  <a:lnTo>
-                    <a:pt x="4440596" y="183387"/>
-                  </a:lnTo>
-                  <a:lnTo>
-                    <a:pt x="4512219" y="178846"/>
-                  </a:lnTo>
-                  <a:lnTo>
-                    <a:pt x="4583841" y="174283"/>
-                  </a:lnTo>
-                  <a:lnTo>
-                    <a:pt x="4655464" y="169699"/>
-                  </a:lnTo>
-                  <a:lnTo>
-                    <a:pt x="4727086" y="165093"/>
-                  </a:lnTo>
-                  <a:lnTo>
-                    <a:pt x="4798709" y="160464"/>
-                  </a:lnTo>
-                  <a:lnTo>
-                    <a:pt x="4870331" y="155813"/>
-                  </a:lnTo>
-                  <a:lnTo>
-                    <a:pt x="4941954" y="151140"/>
-                  </a:lnTo>
-                  <a:lnTo>
-                    <a:pt x="5013576" y="146444"/>
-                  </a:lnTo>
-                  <a:lnTo>
-                    <a:pt x="5085199" y="141726"/>
-                  </a:lnTo>
-                  <a:lnTo>
-                    <a:pt x="5156821" y="136985"/>
-                  </a:lnTo>
-                  <a:lnTo>
-                    <a:pt x="5228444" y="132222"/>
-                  </a:lnTo>
-                  <a:lnTo>
-                    <a:pt x="5300066" y="127435"/>
-                  </a:lnTo>
-                  <a:lnTo>
-                    <a:pt x="5371689" y="122625"/>
-                  </a:lnTo>
-                  <a:lnTo>
-                    <a:pt x="5443311" y="117793"/>
-                  </a:lnTo>
-                  <a:lnTo>
-                    <a:pt x="5514934" y="112937"/>
-                  </a:lnTo>
-                  <a:lnTo>
-                    <a:pt x="5586557" y="108058"/>
-                  </a:lnTo>
-                  <a:lnTo>
-                    <a:pt x="5658179" y="103155"/>
-                  </a:lnTo>
-                  <a:lnTo>
-                    <a:pt x="5729802" y="98229"/>
-                  </a:lnTo>
-                  <a:lnTo>
-                    <a:pt x="5801424" y="93279"/>
-                  </a:lnTo>
-                  <a:lnTo>
-                    <a:pt x="5873047" y="88305"/>
-                  </a:lnTo>
-                  <a:lnTo>
-                    <a:pt x="5944669" y="83307"/>
-                  </a:lnTo>
-                  <a:lnTo>
-                    <a:pt x="6016292" y="78286"/>
-                  </a:lnTo>
-                  <a:lnTo>
-                    <a:pt x="6087914" y="73240"/>
-                  </a:lnTo>
-                  <a:lnTo>
-                    <a:pt x="6159537" y="68170"/>
-                  </a:lnTo>
-                  <a:lnTo>
-                    <a:pt x="6231159" y="63076"/>
-                  </a:lnTo>
-                  <a:lnTo>
-                    <a:pt x="6302782" y="57957"/>
-                  </a:lnTo>
-                  <a:lnTo>
-                    <a:pt x="6374404" y="52813"/>
-                  </a:lnTo>
-                  <a:lnTo>
-                    <a:pt x="6446027" y="47645"/>
-                  </a:lnTo>
-                  <a:lnTo>
-                    <a:pt x="6517649" y="42452"/>
-                  </a:lnTo>
-                  <a:lnTo>
-                    <a:pt x="6589272" y="37234"/>
-                  </a:lnTo>
-                  <a:lnTo>
-                    <a:pt x="6660894" y="31991"/>
-                  </a:lnTo>
-                  <a:lnTo>
-                    <a:pt x="6732517" y="26723"/>
-                  </a:lnTo>
-                  <a:lnTo>
-                    <a:pt x="6804139" y="21429"/>
-                  </a:lnTo>
-                  <a:lnTo>
-                    <a:pt x="6875762" y="16110"/>
-                  </a:lnTo>
-                  <a:lnTo>
-                    <a:pt x="6947385" y="10766"/>
-                  </a:lnTo>
-                  <a:lnTo>
-                    <a:pt x="7019007" y="5396"/>
+                    <a:pt x="71622" y="365830"/>
+                  </a:lnTo>
+                  <a:lnTo>
+                    <a:pt x="143245" y="362801"/>
+                  </a:lnTo>
+                  <a:lnTo>
+                    <a:pt x="214867" y="359758"/>
+                  </a:lnTo>
+                  <a:lnTo>
+                    <a:pt x="286490" y="356703"/>
+                  </a:lnTo>
+                  <a:lnTo>
+                    <a:pt x="358112" y="353635"/>
+                  </a:lnTo>
+                  <a:lnTo>
+                    <a:pt x="429735" y="350554"/>
+                  </a:lnTo>
+                  <a:lnTo>
+                    <a:pt x="501357" y="347461"/>
+                  </a:lnTo>
+                  <a:lnTo>
+                    <a:pt x="572980" y="344354"/>
+                  </a:lnTo>
+                  <a:lnTo>
+                    <a:pt x="644602" y="341235"/>
+                  </a:lnTo>
+                  <a:lnTo>
+                    <a:pt x="716225" y="338103"/>
+                  </a:lnTo>
+                  <a:lnTo>
+                    <a:pt x="787847" y="334957"/>
+                  </a:lnTo>
+                  <a:lnTo>
+                    <a:pt x="859470" y="331798"/>
+                  </a:lnTo>
+                  <a:lnTo>
+                    <a:pt x="931092" y="328627"/>
+                  </a:lnTo>
+                  <a:lnTo>
+                    <a:pt x="1002715" y="325442"/>
+                  </a:lnTo>
+                  <a:lnTo>
+                    <a:pt x="1074337" y="322244"/>
+                  </a:lnTo>
+                  <a:lnTo>
+                    <a:pt x="1145960" y="319032"/>
+                  </a:lnTo>
+                  <a:lnTo>
+                    <a:pt x="1217582" y="315807"/>
+                  </a:lnTo>
+                  <a:lnTo>
+                    <a:pt x="1289205" y="312569"/>
+                  </a:lnTo>
+                  <a:lnTo>
+                    <a:pt x="1360827" y="309317"/>
+                  </a:lnTo>
+                  <a:lnTo>
+                    <a:pt x="1432450" y="306051"/>
+                  </a:lnTo>
+                  <a:lnTo>
+                    <a:pt x="1504073" y="302772"/>
+                  </a:lnTo>
+                  <a:lnTo>
+                    <a:pt x="1575695" y="299479"/>
+                  </a:lnTo>
+                  <a:lnTo>
+                    <a:pt x="1647318" y="296173"/>
+                  </a:lnTo>
+                  <a:lnTo>
+                    <a:pt x="1718940" y="292853"/>
+                  </a:lnTo>
+                  <a:lnTo>
+                    <a:pt x="1790563" y="289519"/>
+                  </a:lnTo>
+                  <a:lnTo>
+                    <a:pt x="1862185" y="286171"/>
+                  </a:lnTo>
+                  <a:lnTo>
+                    <a:pt x="1933808" y="282809"/>
+                  </a:lnTo>
+                  <a:lnTo>
+                    <a:pt x="2005430" y="279433"/>
+                  </a:lnTo>
+                  <a:lnTo>
+                    <a:pt x="2077053" y="276043"/>
+                  </a:lnTo>
+                  <a:lnTo>
+                    <a:pt x="2148675" y="272639"/>
+                  </a:lnTo>
+                  <a:lnTo>
+                    <a:pt x="2220298" y="269220"/>
+                  </a:lnTo>
+                  <a:lnTo>
+                    <a:pt x="2291920" y="265788"/>
+                  </a:lnTo>
+                  <a:lnTo>
+                    <a:pt x="2363543" y="262341"/>
+                  </a:lnTo>
+                  <a:lnTo>
+                    <a:pt x="2435165" y="258879"/>
+                  </a:lnTo>
+                  <a:lnTo>
+                    <a:pt x="2506788" y="255404"/>
+                  </a:lnTo>
+                  <a:lnTo>
+                    <a:pt x="2578410" y="251913"/>
+                  </a:lnTo>
+                  <a:lnTo>
+                    <a:pt x="2650033" y="248409"/>
+                  </a:lnTo>
+                  <a:lnTo>
+                    <a:pt x="2721655" y="244889"/>
+                  </a:lnTo>
+                  <a:lnTo>
+                    <a:pt x="2793278" y="241355"/>
+                  </a:lnTo>
+                  <a:lnTo>
+                    <a:pt x="2864901" y="237806"/>
+                  </a:lnTo>
+                  <a:lnTo>
+                    <a:pt x="2936523" y="234243"/>
+                  </a:lnTo>
+                  <a:lnTo>
+                    <a:pt x="3008146" y="230664"/>
+                  </a:lnTo>
+                  <a:lnTo>
+                    <a:pt x="3079768" y="227071"/>
+                  </a:lnTo>
+                  <a:lnTo>
+                    <a:pt x="3151391" y="223463"/>
+                  </a:lnTo>
+                  <a:lnTo>
+                    <a:pt x="3223013" y="219839"/>
+                  </a:lnTo>
+                  <a:lnTo>
+                    <a:pt x="3294636" y="216201"/>
+                  </a:lnTo>
+                  <a:lnTo>
+                    <a:pt x="3366258" y="212547"/>
+                  </a:lnTo>
+                  <a:lnTo>
+                    <a:pt x="3437881" y="208878"/>
+                  </a:lnTo>
+                  <a:lnTo>
+                    <a:pt x="3509503" y="205194"/>
+                  </a:lnTo>
+                  <a:lnTo>
+                    <a:pt x="3581126" y="201495"/>
+                  </a:lnTo>
+                  <a:lnTo>
+                    <a:pt x="3652748" y="197780"/>
+                  </a:lnTo>
+                  <a:lnTo>
+                    <a:pt x="3724371" y="194049"/>
+                  </a:lnTo>
+                  <a:lnTo>
+                    <a:pt x="3795993" y="190303"/>
+                  </a:lnTo>
+                  <a:lnTo>
+                    <a:pt x="3867616" y="186542"/>
+                  </a:lnTo>
+                  <a:lnTo>
+                    <a:pt x="3939238" y="182764"/>
+                  </a:lnTo>
+                  <a:lnTo>
+                    <a:pt x="4010861" y="178971"/>
+                  </a:lnTo>
+                  <a:lnTo>
+                    <a:pt x="4082483" y="175162"/>
+                  </a:lnTo>
+                  <a:lnTo>
+                    <a:pt x="4154106" y="171338"/>
+                  </a:lnTo>
+                  <a:lnTo>
+                    <a:pt x="4225729" y="167497"/>
+                  </a:lnTo>
+                  <a:lnTo>
+                    <a:pt x="4297351" y="163640"/>
+                  </a:lnTo>
+                  <a:lnTo>
+                    <a:pt x="4368974" y="159767"/>
+                  </a:lnTo>
+                  <a:lnTo>
+                    <a:pt x="4440596" y="155878"/>
+                  </a:lnTo>
+                  <a:lnTo>
+                    <a:pt x="4512219" y="151973"/>
+                  </a:lnTo>
+                  <a:lnTo>
+                    <a:pt x="4583841" y="148052"/>
+                  </a:lnTo>
+                  <a:lnTo>
+                    <a:pt x="4655464" y="144114"/>
+                  </a:lnTo>
+                  <a:lnTo>
+                    <a:pt x="4727086" y="140160"/>
+                  </a:lnTo>
+                  <a:lnTo>
+                    <a:pt x="4798709" y="136189"/>
+                  </a:lnTo>
+                  <a:lnTo>
+                    <a:pt x="4870331" y="132202"/>
+                  </a:lnTo>
+                  <a:lnTo>
+                    <a:pt x="4941954" y="128198"/>
+                  </a:lnTo>
+                  <a:lnTo>
+                    <a:pt x="5013576" y="124178"/>
+                  </a:lnTo>
+                  <a:lnTo>
+                    <a:pt x="5085199" y="120140"/>
+                  </a:lnTo>
+                  <a:lnTo>
+                    <a:pt x="5156821" y="116086"/>
+                  </a:lnTo>
+                  <a:lnTo>
+                    <a:pt x="5228444" y="112015"/>
+                  </a:lnTo>
+                  <a:lnTo>
+                    <a:pt x="5300066" y="107927"/>
+                  </a:lnTo>
+                  <a:lnTo>
+                    <a:pt x="5371689" y="103822"/>
+                  </a:lnTo>
+                  <a:lnTo>
+                    <a:pt x="5443311" y="99700"/>
+                  </a:lnTo>
+                  <a:lnTo>
+                    <a:pt x="5514934" y="95561"/>
+                  </a:lnTo>
+                  <a:lnTo>
+                    <a:pt x="5586557" y="91404"/>
+                  </a:lnTo>
+                  <a:lnTo>
+                    <a:pt x="5658179" y="87230"/>
+                  </a:lnTo>
+                  <a:lnTo>
+                    <a:pt x="5729802" y="83039"/>
+                  </a:lnTo>
+                  <a:lnTo>
+                    <a:pt x="5801424" y="78830"/>
+                  </a:lnTo>
+                  <a:lnTo>
+                    <a:pt x="5873047" y="74604"/>
+                  </a:lnTo>
+                  <a:lnTo>
+                    <a:pt x="5944669" y="70360"/>
+                  </a:lnTo>
+                  <a:lnTo>
+                    <a:pt x="6016292" y="66098"/>
+                  </a:lnTo>
+                  <a:lnTo>
+                    <a:pt x="6087914" y="61819"/>
+                  </a:lnTo>
+                  <a:lnTo>
+                    <a:pt x="6159537" y="57522"/>
+                  </a:lnTo>
+                  <a:lnTo>
+                    <a:pt x="6231159" y="53206"/>
+                  </a:lnTo>
+                  <a:lnTo>
+                    <a:pt x="6302782" y="48873"/>
+                  </a:lnTo>
+                  <a:lnTo>
+                    <a:pt x="6374404" y="44522"/>
+                  </a:lnTo>
+                  <a:lnTo>
+                    <a:pt x="6446027" y="40153"/>
+                  </a:lnTo>
+                  <a:lnTo>
+                    <a:pt x="6517649" y="35765"/>
+                  </a:lnTo>
+                  <a:lnTo>
+                    <a:pt x="6589272" y="31359"/>
+                  </a:lnTo>
+                  <a:lnTo>
+                    <a:pt x="6660894" y="26935"/>
+                  </a:lnTo>
+                  <a:lnTo>
+                    <a:pt x="6732517" y="22492"/>
+                  </a:lnTo>
+                  <a:lnTo>
+                    <a:pt x="6804139" y="18031"/>
+                  </a:lnTo>
+                  <a:lnTo>
+                    <a:pt x="6875762" y="13551"/>
+                  </a:lnTo>
+                  <a:lnTo>
+                    <a:pt x="6947385" y="9053"/>
+                  </a:lnTo>
+                  <a:lnTo>
+                    <a:pt x="7019007" y="4536"/>
                   </a:lnTo>
                   <a:lnTo>
                     <a:pt x="7090630" y="0"/>
@@ -4554,7 +4554,7 @@
           </p:nvSpPr>
           <p:spPr>
             <a:xfrm>
-              <a:off x="4374536" y="1896563"/>
+              <a:off x="4334057" y="1896563"/>
               <a:ext cx="0" cy="3826579"/>
             </a:xfrm>
             <a:custGeom>
@@ -4827,7 +4827,7 @@
           </p:nvSpPr>
           <p:spPr>
             <a:xfrm>
-              <a:off x="2009531" y="5785772"/>
+              <a:off x="2008892" y="5785772"/>
               <a:ext cx="223753" cy="80101"/>
             </a:xfrm>
             <a:prstGeom prst="rect">
@@ -4873,7 +4873,7 @@
           </p:nvSpPr>
           <p:spPr>
             <a:xfrm>
-              <a:off x="4372762" y="5785772"/>
+              <a:off x="4369739" y="5785772"/>
               <a:ext cx="62179" cy="80101"/>
             </a:xfrm>
             <a:prstGeom prst="rect">
@@ -4919,7 +4919,7 @@
           </p:nvSpPr>
           <p:spPr>
             <a:xfrm>
-              <a:off x="6593026" y="5785772"/>
+              <a:off x="6587619" y="5785772"/>
               <a:ext cx="186537" cy="80101"/>
             </a:xfrm>
             <a:prstGeom prst="rect">
